--- a/docs/CloudMonitor_Cloud_Computing_Mini_Project_.pptx
+++ b/docs/CloudMonitor_Cloud_Computing_Mini_Project_.pptx
@@ -1974,7 +1974,7 @@
             <a:fld id="{5586B75A-687E-405C-8A0B-8D00578BA2C3}" type="datetimeFigureOut">
               <a:rPr lang="en-US" smtClean="0"/>
               <a:pPr/>
-              <a:t>10/28/2026</a:t>
+              <a:t>10/29/2026</a:t>
             </a:fld>
             <a:endParaRPr lang="en-US" dirty="0"/>
           </a:p>
@@ -2248,7 +2248,7 @@
             <a:fld id="{5586B75A-687E-405C-8A0B-8D00578BA2C3}" type="datetimeFigureOut">
               <a:rPr lang="en-US" smtClean="0"/>
               <a:pPr/>
-              <a:t>10/28/2026</a:t>
+              <a:t>10/29/2026</a:t>
             </a:fld>
             <a:endParaRPr lang="en-US" dirty="0"/>
           </a:p>
@@ -2445,7 +2445,7 @@
             <a:fld id="{5586B75A-687E-405C-8A0B-8D00578BA2C3}" type="datetimeFigureOut">
               <a:rPr lang="en-US" smtClean="0"/>
               <a:pPr/>
-              <a:t>10/28/2026</a:t>
+              <a:t>10/29/2026</a:t>
             </a:fld>
             <a:endParaRPr lang="en-US" dirty="0"/>
           </a:p>
@@ -2721,7 +2721,7 @@
             <a:fld id="{5586B75A-687E-405C-8A0B-8D00578BA2C3}" type="datetimeFigureOut">
               <a:rPr lang="en-US" smtClean="0"/>
               <a:pPr/>
-              <a:t>10/28/2026</a:t>
+              <a:t>10/29/2026</a:t>
             </a:fld>
             <a:endParaRPr lang="en-US" dirty="0"/>
           </a:p>
@@ -3065,7 +3065,7 @@
             <a:fld id="{5586B75A-687E-405C-8A0B-8D00578BA2C3}" type="datetimeFigureOut">
               <a:rPr lang="en-US" smtClean="0"/>
               <a:pPr/>
-              <a:t>10/28/2026</a:t>
+              <a:t>10/29/2026</a:t>
             </a:fld>
             <a:endParaRPr lang="en-US" dirty="0"/>
           </a:p>
@@ -3691,7 +3691,7 @@
             <a:fld id="{5586B75A-687E-405C-8A0B-8D00578BA2C3}" type="datetimeFigureOut">
               <a:rPr lang="en-US" smtClean="0"/>
               <a:pPr/>
-              <a:t>10/28/2026</a:t>
+              <a:t>10/29/2026</a:t>
             </a:fld>
             <a:endParaRPr lang="en-US" dirty="0"/>
           </a:p>
@@ -4542,7 +4542,7 @@
             <a:fld id="{5586B75A-687E-405C-8A0B-8D00578BA2C3}" type="datetimeFigureOut">
               <a:rPr lang="en-US" smtClean="0"/>
               <a:pPr/>
-              <a:t>10/28/2026</a:t>
+              <a:t>10/29/2026</a:t>
             </a:fld>
             <a:endParaRPr lang="en-US" dirty="0"/>
           </a:p>
@@ -4715,7 +4715,7 @@
             <a:fld id="{5586B75A-687E-405C-8A0B-8D00578BA2C3}" type="datetimeFigureOut">
               <a:rPr lang="en-US" smtClean="0"/>
               <a:pPr/>
-              <a:t>10/28/2026</a:t>
+              <a:t>10/29/2026</a:t>
             </a:fld>
             <a:endParaRPr lang="en-US" dirty="0"/>
           </a:p>
@@ -4898,7 +4898,7 @@
             <a:fld id="{5586B75A-687E-405C-8A0B-8D00578BA2C3}" type="datetimeFigureOut">
               <a:rPr lang="en-US" smtClean="0"/>
               <a:pPr/>
-              <a:t>10/28/2026</a:t>
+              <a:t>10/29/2026</a:t>
             </a:fld>
             <a:endParaRPr lang="en-US" dirty="0"/>
           </a:p>
@@ -5126,7 +5126,7 @@
           </a:prstGeom>
           <a:extLst>
             <a:ext uri="{C572A759-6A51-4108-AA02-DFA0A04FC94B}">
-              <ma14:wrappingTextBoxFlag xmlns:ma14="http://schemas.microsoft.com/office/mac/drawingml/2011/main" xmlns="" val="0"/>
+              <ma14:wrappingTextBoxFlag xmlns="" xmlns:ma14="http://schemas.microsoft.com/office/mac/drawingml/2011/main" val="0"/>
             </a:ext>
           </a:extLst>
         </p:spPr>
@@ -5274,7 +5274,7 @@
             <a:fld id="{5586B75A-687E-405C-8A0B-8D00578BA2C3}" type="datetimeFigureOut">
               <a:rPr lang="en-US" smtClean="0"/>
               <a:pPr/>
-              <a:t>10/28/2026</a:t>
+              <a:t>10/29/2026</a:t>
             </a:fld>
             <a:endParaRPr lang="en-US" dirty="0"/>
           </a:p>
@@ -5524,7 +5524,7 @@
             <a:fld id="{5586B75A-687E-405C-8A0B-8D00578BA2C3}" type="datetimeFigureOut">
               <a:rPr lang="en-US" smtClean="0"/>
               <a:pPr/>
-              <a:t>10/28/2026</a:t>
+              <a:t>10/29/2026</a:t>
             </a:fld>
             <a:endParaRPr lang="en-US" dirty="0"/>
           </a:p>
@@ -5819,7 +5819,7 @@
             <a:fld id="{5586B75A-687E-405C-8A0B-8D00578BA2C3}" type="datetimeFigureOut">
               <a:rPr lang="en-US" smtClean="0"/>
               <a:pPr/>
-              <a:t>10/28/2026</a:t>
+              <a:t>10/29/2026</a:t>
             </a:fld>
             <a:endParaRPr lang="en-US" dirty="0"/>
           </a:p>
@@ -6266,7 +6266,7 @@
             <a:fld id="{5586B75A-687E-405C-8A0B-8D00578BA2C3}" type="datetimeFigureOut">
               <a:rPr lang="en-US" smtClean="0"/>
               <a:pPr/>
-              <a:t>10/28/2026</a:t>
+              <a:t>10/29/2026</a:t>
             </a:fld>
             <a:endParaRPr lang="en-US" dirty="0"/>
           </a:p>
@@ -6387,7 +6387,7 @@
             <a:fld id="{5586B75A-687E-405C-8A0B-8D00578BA2C3}" type="datetimeFigureOut">
               <a:rPr lang="en-US" smtClean="0"/>
               <a:pPr/>
-              <a:t>10/28/2026</a:t>
+              <a:t>10/29/2026</a:t>
             </a:fld>
             <a:endParaRPr lang="en-US" dirty="0"/>
           </a:p>
@@ -6485,7 +6485,7 @@
             <a:fld id="{5586B75A-687E-405C-8A0B-8D00578BA2C3}" type="datetimeFigureOut">
               <a:rPr lang="en-US" smtClean="0"/>
               <a:pPr/>
-              <a:t>10/28/2026</a:t>
+              <a:t>10/29/2026</a:t>
             </a:fld>
             <a:endParaRPr lang="en-US" dirty="0"/>
           </a:p>
@@ -6767,7 +6767,7 @@
             <a:fld id="{5586B75A-687E-405C-8A0B-8D00578BA2C3}" type="datetimeFigureOut">
               <a:rPr lang="en-US" smtClean="0"/>
               <a:pPr/>
-              <a:t>10/28/2026</a:t>
+              <a:t>10/29/2026</a:t>
             </a:fld>
             <a:endParaRPr lang="en-US" dirty="0"/>
           </a:p>
@@ -7041,7 +7041,7 @@
             <a:fld id="{5586B75A-687E-405C-8A0B-8D00578BA2C3}" type="datetimeFigureOut">
               <a:rPr lang="en-US" smtClean="0"/>
               <a:pPr/>
-              <a:t>10/28/2026</a:t>
+              <a:t>10/29/2026</a:t>
             </a:fld>
             <a:endParaRPr lang="en-US" dirty="0"/>
           </a:p>
@@ -7483,7 +7483,7 @@
             <a:fld id="{5586B75A-687E-405C-8A0B-8D00578BA2C3}" type="datetimeFigureOut">
               <a:rPr lang="en-US" smtClean="0"/>
               <a:pPr/>
-              <a:t>10/28/2026</a:t>
+              <a:t>10/29/2026</a:t>
             </a:fld>
             <a:endParaRPr lang="en-US" dirty="0"/>
           </a:p>
@@ -8820,7 +8820,7 @@
           </a:prstGeom>
           <a:extLst>
             <a:ext uri="{C572A759-6A51-4108-AA02-DFA0A04FC94B}">
-              <ma14:wrappingTextBoxFlag xmlns:ma14="http://schemas.microsoft.com/office/mac/drawingml/2011/main" xmlns="" val="0"/>
+              <ma14:wrappingTextBoxFlag xmlns="" xmlns:ma14="http://schemas.microsoft.com/office/mac/drawingml/2011/main" val="0"/>
             </a:ext>
           </a:extLst>
         </p:spPr>
@@ -8898,64 +8898,6 @@
               <a:rPr lang="en-US" dirty="0"/>
               <a:t>10. Security &amp; Cost Considerations</a:t>
             </a:r>
-          </a:p>
-        </p:txBody>
-      </p:sp>
-      <p:sp>
-        <p:nvSpPr>
-          <p:cNvPr id="3" name="Shape 1"/>
-          <p:cNvSpPr/>
-          <p:nvPr/>
-        </p:nvSpPr>
-        <p:spPr>
-          <a:xfrm>
-            <a:off x="5943600" y="4754880"/>
-            <a:ext cx="2194560" cy="274320"/>
-          </a:xfrm>
-          <a:prstGeom prst="roundRect">
-            <a:avLst>
-              <a:gd name="adj" fmla="val 20000"/>
-            </a:avLst>
-          </a:prstGeom>
-          <a:solidFill>
-            <a:schemeClr val="accent2"/>
-          </a:solidFill>
-          <a:ln/>
-        </p:spPr>
-      </p:sp>
-      <p:sp>
-        <p:nvSpPr>
-          <p:cNvPr id="4" name="Text 2"/>
-          <p:cNvSpPr txBox="1"/>
-          <p:nvPr/>
-        </p:nvSpPr>
-        <p:spPr>
-          <a:xfrm>
-            <a:off x="5943600" y="4754880"/>
-            <a:ext cx="2194560" cy="274320"/>
-          </a:xfrm>
-          <a:prstGeom prst="rect">
-            <a:avLst/>
-          </a:prstGeom>
-          <a:noFill/>
-          <a:ln/>
-        </p:spPr>
-        <p:txBody>
-          <a:bodyPr wrap="square" lIns="0" tIns="0" rIns="0" bIns="0" rtlCol="0" anchor="ctr"/>
-          <a:lstStyle/>
-          <a:p>
-            <a:pPr marL="0" indent="0" algn="ctr">
-              <a:buNone/>
-            </a:pPr>
-            <a:r>
-              <a:rPr lang="en-US" sz="1000" b="1" dirty="0">
-                <a:solidFill>
-                  <a:schemeClr val="tx2"/>
-                </a:solidFill>
-              </a:rPr>
-              <a:t>SAMPLE DATA: replace with real</a:t>
-            </a:r>
-            <a:endParaRPr lang="en-US" sz="1000" dirty="0"/>
           </a:p>
         </p:txBody>
       </p:sp>
@@ -10229,7 +10171,7 @@
           </a:prstGeom>
           <a:extLst>
             <a:ext uri="{C572A759-6A51-4108-AA02-DFA0A04FC94B}">
-              <ma14:wrappingTextBoxFlag xmlns:ma14="http://schemas.microsoft.com/office/mac/drawingml/2011/main" xmlns="" val="0"/>
+              <ma14:wrappingTextBoxFlag xmlns="" xmlns:ma14="http://schemas.microsoft.com/office/mac/drawingml/2011/main" val="0"/>
             </a:ext>
           </a:extLst>
         </p:spPr>
@@ -10612,7 +10554,7 @@
           </a:prstGeom>
           <a:extLst>
             <a:ext uri="{C572A759-6A51-4108-AA02-DFA0A04FC94B}">
-              <ma14:wrappingTextBoxFlag xmlns:ma14="http://schemas.microsoft.com/office/mac/drawingml/2011/main" xmlns="" val="0"/>
+              <ma14:wrappingTextBoxFlag xmlns="" xmlns:ma14="http://schemas.microsoft.com/office/mac/drawingml/2011/main" val="0"/>
             </a:ext>
           </a:extLst>
         </p:spPr>
@@ -12089,7 +12031,7 @@
           </a:prstGeom>
           <a:extLst>
             <a:ext uri="{C572A759-6A51-4108-AA02-DFA0A04FC94B}">
-              <ma14:wrappingTextBoxFlag xmlns:ma14="http://schemas.microsoft.com/office/mac/drawingml/2011/main" xmlns="" val="0"/>
+              <ma14:wrappingTextBoxFlag xmlns="" xmlns:ma14="http://schemas.microsoft.com/office/mac/drawingml/2011/main" val="0"/>
             </a:ext>
           </a:extLst>
         </p:spPr>
@@ -13062,7 +13004,7 @@
           </a:prstGeom>
           <a:extLst>
             <a:ext uri="{C572A759-6A51-4108-AA02-DFA0A04FC94B}">
-              <ma14:wrappingTextBoxFlag xmlns:ma14="http://schemas.microsoft.com/office/mac/drawingml/2011/main" xmlns="" val="0"/>
+              <ma14:wrappingTextBoxFlag xmlns="" xmlns:ma14="http://schemas.microsoft.com/office/mac/drawingml/2011/main" val="0"/>
             </a:ext>
           </a:extLst>
         </p:spPr>
@@ -13619,7 +13561,7 @@
           </a:prstGeom>
           <a:extLst>
             <a:ext uri="{C572A759-6A51-4108-AA02-DFA0A04FC94B}">
-              <ma14:wrappingTextBoxFlag xmlns:ma14="http://schemas.microsoft.com/office/mac/drawingml/2011/main" xmlns="" val="0"/>
+              <ma14:wrappingTextBoxFlag xmlns="" xmlns:ma14="http://schemas.microsoft.com/office/mac/drawingml/2011/main" val="0"/>
             </a:ext>
           </a:extLst>
         </p:spPr>
@@ -14311,7 +14253,7 @@
           </a:prstGeom>
           <a:extLst>
             <a:ext uri="{C572A759-6A51-4108-AA02-DFA0A04FC94B}">
-              <ma14:wrappingTextBoxFlag xmlns:ma14="http://schemas.microsoft.com/office/mac/drawingml/2011/main" xmlns="" val="0"/>
+              <ma14:wrappingTextBoxFlag xmlns="" xmlns:ma14="http://schemas.microsoft.com/office/mac/drawingml/2011/main" val="0"/>
             </a:ext>
           </a:extLst>
         </p:spPr>
@@ -14874,7 +14816,7 @@
           </a:prstGeom>
           <a:extLst>
             <a:ext uri="{C572A759-6A51-4108-AA02-DFA0A04FC94B}">
-              <ma14:wrappingTextBoxFlag xmlns:ma14="http://schemas.microsoft.com/office/mac/drawingml/2011/main" xmlns="" val="0"/>
+              <ma14:wrappingTextBoxFlag xmlns="" xmlns:ma14="http://schemas.microsoft.com/office/mac/drawingml/2011/main" val="0"/>
             </a:ext>
           </a:extLst>
         </p:spPr>
@@ -15793,7 +15735,7 @@
           </a:prstGeom>
           <a:extLst>
             <a:ext uri="{C572A759-6A51-4108-AA02-DFA0A04FC94B}">
-              <ma14:wrappingTextBoxFlag xmlns:ma14="http://schemas.microsoft.com/office/mac/drawingml/2011/main" xmlns="" val="0"/>
+              <ma14:wrappingTextBoxFlag xmlns="" xmlns:ma14="http://schemas.microsoft.com/office/mac/drawingml/2011/main" val="0"/>
             </a:ext>
           </a:extLst>
         </p:spPr>
@@ -16854,7 +16796,7 @@
           </a:prstGeom>
           <a:extLst>
             <a:ext uri="{C572A759-6A51-4108-AA02-DFA0A04FC94B}">
-              <ma14:wrappingTextBoxFlag xmlns:ma14="http://schemas.microsoft.com/office/mac/drawingml/2011/main" xmlns="" val="0"/>
+              <ma14:wrappingTextBoxFlag xmlns="" xmlns:ma14="http://schemas.microsoft.com/office/mac/drawingml/2011/main" val="0"/>
             </a:ext>
           </a:extLst>
         </p:spPr>
@@ -17331,7 +17273,7 @@
           </a:prstGeom>
           <a:extLst>
             <a:ext uri="{C572A759-6A51-4108-AA02-DFA0A04FC94B}">
-              <ma14:wrappingTextBoxFlag xmlns:ma14="http://schemas.microsoft.com/office/mac/drawingml/2011/main" xmlns="" val="0"/>
+              <ma14:wrappingTextBoxFlag xmlns="" xmlns:ma14="http://schemas.microsoft.com/office/mac/drawingml/2011/main" val="0"/>
             </a:ext>
           </a:extLst>
         </p:spPr>
@@ -18286,7 +18228,7 @@
           </a:prstGeom>
           <a:extLst>
             <a:ext uri="{C572A759-6A51-4108-AA02-DFA0A04FC94B}">
-              <ma14:wrappingTextBoxFlag xmlns:ma14="http://schemas.microsoft.com/office/mac/drawingml/2011/main" xmlns="" val="0"/>
+              <ma14:wrappingTextBoxFlag xmlns="" xmlns:ma14="http://schemas.microsoft.com/office/mac/drawingml/2011/main" val="0"/>
             </a:ext>
           </a:extLst>
         </p:spPr>
@@ -19069,7 +19011,7 @@
           </a:prstGeom>
           <a:extLst>
             <a:ext uri="{C572A759-6A51-4108-AA02-DFA0A04FC94B}">
-              <ma14:wrappingTextBoxFlag xmlns:ma14="http://schemas.microsoft.com/office/mac/drawingml/2011/main" xmlns="" val="0"/>
+              <ma14:wrappingTextBoxFlag xmlns="" xmlns:ma14="http://schemas.microsoft.com/office/mac/drawingml/2011/main" val="0"/>
             </a:ext>
           </a:extLst>
         </p:spPr>
@@ -19916,7 +19858,7 @@
           </a:prstGeom>
           <a:extLst>
             <a:ext uri="{C572A759-6A51-4108-AA02-DFA0A04FC94B}">
-              <ma14:wrappingTextBoxFlag xmlns:ma14="http://schemas.microsoft.com/office/mac/drawingml/2011/main" xmlns="" val="0"/>
+              <ma14:wrappingTextBoxFlag xmlns="" xmlns:ma14="http://schemas.microsoft.com/office/mac/drawingml/2011/main" val="0"/>
             </a:ext>
           </a:extLst>
         </p:spPr>

--- a/docs/CloudMonitor_Cloud_Computing_Mini_Project_.pptx
+++ b/docs/CloudMonitor_Cloud_Computing_Mini_Project_.pptx
@@ -9,7 +9,7 @@
   </p:notesMasterIdLst>
   <p:sldIdLst>
     <p:sldId id="273" r:id="rId2"/>
-    <p:sldId id="257" r:id="rId3"/>
+    <p:sldId id="256" r:id="rId3"/>
     <p:sldId id="258" r:id="rId4"/>
     <p:sldId id="259" r:id="rId5"/>
     <p:sldId id="260" r:id="rId6"/>
@@ -676,7 +676,7 @@
           <a:p>
             <a:fld id="{F7021451-1387-4CA6-816F-3879F97B5CBC}" type="slidenum">
               <a:rPr lang="en-US"/>
-              <a:t>10</a:t>
+              <a:t>11</a:t>
             </a:fld>
             <a:endParaRPr lang="en-US"/>
           </a:p>
@@ -760,7 +760,7 @@
           <a:p>
             <a:fld id="{F7021451-1387-4CA6-816F-3879F97B5CBC}" type="slidenum">
               <a:rPr lang="en-US"/>
-              <a:t>11</a:t>
+              <a:t>12</a:t>
             </a:fld>
             <a:endParaRPr lang="en-US"/>
           </a:p>
@@ -844,7 +844,7 @@
           <a:p>
             <a:fld id="{F7021451-1387-4CA6-816F-3879F97B5CBC}" type="slidenum">
               <a:rPr lang="en-US"/>
-              <a:t>12</a:t>
+              <a:t>13</a:t>
             </a:fld>
             <a:endParaRPr lang="en-US"/>
           </a:p>
@@ -928,7 +928,7 @@
           <a:p>
             <a:fld id="{F7021451-1387-4CA6-816F-3879F97B5CBC}" type="slidenum">
               <a:rPr lang="en-US"/>
-              <a:t>13</a:t>
+              <a:t>14</a:t>
             </a:fld>
             <a:endParaRPr lang="en-US"/>
           </a:p>
@@ -1012,90 +1012,6 @@
           <a:p>
             <a:fld id="{F7021451-1387-4CA6-816F-3879F97B5CBC}" type="slidenum">
               <a:rPr lang="en-US"/>
-              <a:t>14</a:t>
-            </a:fld>
-            <a:endParaRPr lang="en-US"/>
-          </a:p>
-        </p:txBody>
-      </p:sp>
-    </p:spTree>
-    <p:extLst>
-      <p:ext uri="{BB962C8B-B14F-4D97-AF65-F5344CB8AC3E}">
-        <p14:creationId xmlns:p14="http://schemas.microsoft.com/office/powerpoint/2010/main" val="1024086991"/>
-      </p:ext>
-    </p:extLst>
-  </p:cSld>
-  <p:clrMapOvr>
-    <a:masterClrMapping/>
-  </p:clrMapOvr>
-</p:notes>
-</file>
-
-<file path=ppt/notesSlides/notesSlide15.xml><?xml version="1.0" encoding="utf-8"?>
-<p:notes xmlns:a="http://schemas.openxmlformats.org/drawingml/2006/main" xmlns:r="http://schemas.openxmlformats.org/officeDocument/2006/relationships" xmlns:p="http://schemas.openxmlformats.org/presentationml/2006/main">
-  <p:cSld>
-    <p:spTree>
-      <p:nvGrpSpPr>
-        <p:cNvPr id="1" name=""/>
-        <p:cNvGrpSpPr/>
-        <p:nvPr/>
-      </p:nvGrpSpPr>
-      <p:grpSpPr>
-        <a:xfrm>
-          <a:off x="0" y="0"/>
-          <a:ext cx="0" cy="0"/>
-          <a:chOff x="0" y="0"/>
-          <a:chExt cx="0" cy="0"/>
-        </a:xfrm>
-      </p:grpSpPr>
-      <p:sp>
-        <p:nvSpPr>
-          <p:cNvPr id="2" name="Slide Image Placeholder 1"/>
-          <p:cNvSpPr>
-            <a:spLocks noGrp="1" noRot="1" noChangeAspect="1"/>
-          </p:cNvSpPr>
-          <p:nvPr>
-            <p:ph type="sldImg"/>
-          </p:nvPr>
-        </p:nvSpPr>
-        <p:spPr/>
-      </p:sp>
-      <p:sp>
-        <p:nvSpPr>
-          <p:cNvPr id="3" name="Notes Placeholder 2"/>
-          <p:cNvSpPr>
-            <a:spLocks noGrp="1"/>
-          </p:cNvSpPr>
-          <p:nvPr>
-            <p:ph type="body" idx="1"/>
-          </p:nvPr>
-        </p:nvSpPr>
-        <p:spPr/>
-        <p:txBody>
-          <a:bodyPr/>
-          <a:lstStyle/>
-          <a:p>
-            <a:endParaRPr lang="en-US" dirty="0"/>
-          </a:p>
-        </p:txBody>
-      </p:sp>
-      <p:sp>
-        <p:nvSpPr>
-          <p:cNvPr id="4" name="Slide Number Placeholder 3"/>
-          <p:cNvSpPr>
-            <a:spLocks noGrp="1"/>
-          </p:cNvSpPr>
-          <p:nvPr>
-            <p:ph type="sldNum" sz="quarter" idx="10"/>
-          </p:nvPr>
-        </p:nvSpPr>
-        <p:spPr/>
-        <p:txBody>
-          <a:bodyPr/>
-          <a:lstStyle/>
-          <a:p>
-            <a:fld id="{F7021451-1387-4CA6-816F-3879F97B5CBC}" type="slidenum">
-              <a:rPr lang="en-US"/>
               <a:t>15</a:t>
             </a:fld>
             <a:endParaRPr lang="en-US"/>
@@ -1180,7 +1096,7 @@
           <a:p>
             <a:fld id="{F7021451-1387-4CA6-816F-3879F97B5CBC}" type="slidenum">
               <a:rPr lang="en-US"/>
-              <a:t>2</a:t>
+              <a:t>3</a:t>
             </a:fld>
             <a:endParaRPr lang="en-US"/>
           </a:p>
@@ -1264,7 +1180,7 @@
           <a:p>
             <a:fld id="{F7021451-1387-4CA6-816F-3879F97B5CBC}" type="slidenum">
               <a:rPr lang="en-US"/>
-              <a:t>3</a:t>
+              <a:t>4</a:t>
             </a:fld>
             <a:endParaRPr lang="en-US"/>
           </a:p>
@@ -1348,7 +1264,7 @@
           <a:p>
             <a:fld id="{F7021451-1387-4CA6-816F-3879F97B5CBC}" type="slidenum">
               <a:rPr lang="en-US"/>
-              <a:t>4</a:t>
+              <a:t>5</a:t>
             </a:fld>
             <a:endParaRPr lang="en-US"/>
           </a:p>
@@ -1432,7 +1348,7 @@
           <a:p>
             <a:fld id="{F7021451-1387-4CA6-816F-3879F97B5CBC}" type="slidenum">
               <a:rPr lang="en-US"/>
-              <a:t>5</a:t>
+              <a:t>6</a:t>
             </a:fld>
             <a:endParaRPr lang="en-US"/>
           </a:p>
@@ -1516,7 +1432,7 @@
           <a:p>
             <a:fld id="{F7021451-1387-4CA6-816F-3879F97B5CBC}" type="slidenum">
               <a:rPr lang="en-US"/>
-              <a:t>6</a:t>
+              <a:t>7</a:t>
             </a:fld>
             <a:endParaRPr lang="en-US"/>
           </a:p>
@@ -1600,7 +1516,7 @@
           <a:p>
             <a:fld id="{F7021451-1387-4CA6-816F-3879F97B5CBC}" type="slidenum">
               <a:rPr lang="en-US"/>
-              <a:t>7</a:t>
+              <a:t>8</a:t>
             </a:fld>
             <a:endParaRPr lang="en-US"/>
           </a:p>
@@ -1684,7 +1600,7 @@
           <a:p>
             <a:fld id="{F7021451-1387-4CA6-816F-3879F97B5CBC}" type="slidenum">
               <a:rPr lang="en-US"/>
-              <a:t>8</a:t>
+              <a:t>9</a:t>
             </a:fld>
             <a:endParaRPr lang="en-US"/>
           </a:p>
@@ -1768,7 +1684,7 @@
           <a:p>
             <a:fld id="{F7021451-1387-4CA6-816F-3879F97B5CBC}" type="slidenum">
               <a:rPr lang="en-US"/>
-              <a:t>9</a:t>
+              <a:t>10</a:t>
             </a:fld>
             <a:endParaRPr lang="en-US"/>
           </a:p>
@@ -1974,7 +1890,7 @@
             <a:fld id="{5586B75A-687E-405C-8A0B-8D00578BA2C3}" type="datetimeFigureOut">
               <a:rPr lang="en-US" smtClean="0"/>
               <a:pPr/>
-              <a:t>10/29/2026</a:t>
+              <a:t>10/31/2026</a:t>
             </a:fld>
             <a:endParaRPr lang="en-US" dirty="0"/>
           </a:p>
@@ -2248,7 +2164,7 @@
             <a:fld id="{5586B75A-687E-405C-8A0B-8D00578BA2C3}" type="datetimeFigureOut">
               <a:rPr lang="en-US" smtClean="0"/>
               <a:pPr/>
-              <a:t>10/29/2026</a:t>
+              <a:t>10/31/2026</a:t>
             </a:fld>
             <a:endParaRPr lang="en-US" dirty="0"/>
           </a:p>
@@ -2445,7 +2361,7 @@
             <a:fld id="{5586B75A-687E-405C-8A0B-8D00578BA2C3}" type="datetimeFigureOut">
               <a:rPr lang="en-US" smtClean="0"/>
               <a:pPr/>
-              <a:t>10/29/2026</a:t>
+              <a:t>10/31/2026</a:t>
             </a:fld>
             <a:endParaRPr lang="en-US" dirty="0"/>
           </a:p>
@@ -2721,7 +2637,7 @@
             <a:fld id="{5586B75A-687E-405C-8A0B-8D00578BA2C3}" type="datetimeFigureOut">
               <a:rPr lang="en-US" smtClean="0"/>
               <a:pPr/>
-              <a:t>10/29/2026</a:t>
+              <a:t>10/31/2026</a:t>
             </a:fld>
             <a:endParaRPr lang="en-US" dirty="0"/>
           </a:p>
@@ -3065,7 +2981,7 @@
             <a:fld id="{5586B75A-687E-405C-8A0B-8D00578BA2C3}" type="datetimeFigureOut">
               <a:rPr lang="en-US" smtClean="0"/>
               <a:pPr/>
-              <a:t>10/29/2026</a:t>
+              <a:t>10/31/2026</a:t>
             </a:fld>
             <a:endParaRPr lang="en-US" dirty="0"/>
           </a:p>
@@ -3691,7 +3607,7 @@
             <a:fld id="{5586B75A-687E-405C-8A0B-8D00578BA2C3}" type="datetimeFigureOut">
               <a:rPr lang="en-US" smtClean="0"/>
               <a:pPr/>
-              <a:t>10/29/2026</a:t>
+              <a:t>10/31/2026</a:t>
             </a:fld>
             <a:endParaRPr lang="en-US" dirty="0"/>
           </a:p>
@@ -4542,7 +4458,7 @@
             <a:fld id="{5586B75A-687E-405C-8A0B-8D00578BA2C3}" type="datetimeFigureOut">
               <a:rPr lang="en-US" smtClean="0"/>
               <a:pPr/>
-              <a:t>10/29/2026</a:t>
+              <a:t>10/31/2026</a:t>
             </a:fld>
             <a:endParaRPr lang="en-US" dirty="0"/>
           </a:p>
@@ -4715,7 +4631,7 @@
             <a:fld id="{5586B75A-687E-405C-8A0B-8D00578BA2C3}" type="datetimeFigureOut">
               <a:rPr lang="en-US" smtClean="0"/>
               <a:pPr/>
-              <a:t>10/29/2026</a:t>
+              <a:t>10/31/2026</a:t>
             </a:fld>
             <a:endParaRPr lang="en-US" dirty="0"/>
           </a:p>
@@ -4898,7 +4814,7 @@
             <a:fld id="{5586B75A-687E-405C-8A0B-8D00578BA2C3}" type="datetimeFigureOut">
               <a:rPr lang="en-US" smtClean="0"/>
               <a:pPr/>
-              <a:t>10/29/2026</a:t>
+              <a:t>10/31/2026</a:t>
             </a:fld>
             <a:endParaRPr lang="en-US" dirty="0"/>
           </a:p>
@@ -5126,7 +5042,7 @@
           </a:prstGeom>
           <a:extLst>
             <a:ext uri="{C572A759-6A51-4108-AA02-DFA0A04FC94B}">
-              <ma14:wrappingTextBoxFlag xmlns="" xmlns:ma14="http://schemas.microsoft.com/office/mac/drawingml/2011/main" val="0"/>
+              <ma14:wrappingTextBoxFlag xmlns:ma14="http://schemas.microsoft.com/office/mac/drawingml/2011/main" xmlns="" val="0"/>
             </a:ext>
           </a:extLst>
         </p:spPr>
@@ -5274,7 +5190,7 @@
             <a:fld id="{5586B75A-687E-405C-8A0B-8D00578BA2C3}" type="datetimeFigureOut">
               <a:rPr lang="en-US" smtClean="0"/>
               <a:pPr/>
-              <a:t>10/29/2026</a:t>
+              <a:t>10/31/2026</a:t>
             </a:fld>
             <a:endParaRPr lang="en-US" dirty="0"/>
           </a:p>
@@ -5524,7 +5440,7 @@
             <a:fld id="{5586B75A-687E-405C-8A0B-8D00578BA2C3}" type="datetimeFigureOut">
               <a:rPr lang="en-US" smtClean="0"/>
               <a:pPr/>
-              <a:t>10/29/2026</a:t>
+              <a:t>10/31/2026</a:t>
             </a:fld>
             <a:endParaRPr lang="en-US" dirty="0"/>
           </a:p>
@@ -5819,7 +5735,7 @@
             <a:fld id="{5586B75A-687E-405C-8A0B-8D00578BA2C3}" type="datetimeFigureOut">
               <a:rPr lang="en-US" smtClean="0"/>
               <a:pPr/>
-              <a:t>10/29/2026</a:t>
+              <a:t>10/31/2026</a:t>
             </a:fld>
             <a:endParaRPr lang="en-US" dirty="0"/>
           </a:p>
@@ -6266,7 +6182,7 @@
             <a:fld id="{5586B75A-687E-405C-8A0B-8D00578BA2C3}" type="datetimeFigureOut">
               <a:rPr lang="en-US" smtClean="0"/>
               <a:pPr/>
-              <a:t>10/29/2026</a:t>
+              <a:t>10/31/2026</a:t>
             </a:fld>
             <a:endParaRPr lang="en-US" dirty="0"/>
           </a:p>
@@ -6387,7 +6303,7 @@
             <a:fld id="{5586B75A-687E-405C-8A0B-8D00578BA2C3}" type="datetimeFigureOut">
               <a:rPr lang="en-US" smtClean="0"/>
               <a:pPr/>
-              <a:t>10/29/2026</a:t>
+              <a:t>10/31/2026</a:t>
             </a:fld>
             <a:endParaRPr lang="en-US" dirty="0"/>
           </a:p>
@@ -6485,7 +6401,7 @@
             <a:fld id="{5586B75A-687E-405C-8A0B-8D00578BA2C3}" type="datetimeFigureOut">
               <a:rPr lang="en-US" smtClean="0"/>
               <a:pPr/>
-              <a:t>10/29/2026</a:t>
+              <a:t>10/31/2026</a:t>
             </a:fld>
             <a:endParaRPr lang="en-US" dirty="0"/>
           </a:p>
@@ -6767,7 +6683,7 @@
             <a:fld id="{5586B75A-687E-405C-8A0B-8D00578BA2C3}" type="datetimeFigureOut">
               <a:rPr lang="en-US" smtClean="0"/>
               <a:pPr/>
-              <a:t>10/29/2026</a:t>
+              <a:t>10/31/2026</a:t>
             </a:fld>
             <a:endParaRPr lang="en-US" dirty="0"/>
           </a:p>
@@ -7041,7 +6957,7 @@
             <a:fld id="{5586B75A-687E-405C-8A0B-8D00578BA2C3}" type="datetimeFigureOut">
               <a:rPr lang="en-US" smtClean="0"/>
               <a:pPr/>
-              <a:t>10/29/2026</a:t>
+              <a:t>10/31/2026</a:t>
             </a:fld>
             <a:endParaRPr lang="en-US" dirty="0"/>
           </a:p>
@@ -7483,7 +7399,7 @@
             <a:fld id="{5586B75A-687E-405C-8A0B-8D00578BA2C3}" type="datetimeFigureOut">
               <a:rPr lang="en-US" smtClean="0"/>
               <a:pPr/>
-              <a:t>10/29/2026</a:t>
+              <a:t>10/31/2026</a:t>
             </a:fld>
             <a:endParaRPr lang="en-US" dirty="0"/>
           </a:p>
@@ -8820,7 +8736,7 @@
           </a:prstGeom>
           <a:extLst>
             <a:ext uri="{C572A759-6A51-4108-AA02-DFA0A04FC94B}">
-              <ma14:wrappingTextBoxFlag xmlns="" xmlns:ma14="http://schemas.microsoft.com/office/mac/drawingml/2011/main" val="0"/>
+              <ma14:wrappingTextBoxFlag xmlns:ma14="http://schemas.microsoft.com/office/mac/drawingml/2011/main" xmlns="" val="0"/>
             </a:ext>
           </a:extLst>
         </p:spPr>
@@ -10171,7 +10087,7 @@
           </a:prstGeom>
           <a:extLst>
             <a:ext uri="{C572A759-6A51-4108-AA02-DFA0A04FC94B}">
-              <ma14:wrappingTextBoxFlag xmlns="" xmlns:ma14="http://schemas.microsoft.com/office/mac/drawingml/2011/main" val="0"/>
+              <ma14:wrappingTextBoxFlag xmlns:ma14="http://schemas.microsoft.com/office/mac/drawingml/2011/main" xmlns="" val="0"/>
             </a:ext>
           </a:extLst>
         </p:spPr>
@@ -10554,7 +10470,7 @@
           </a:prstGeom>
           <a:extLst>
             <a:ext uri="{C572A759-6A51-4108-AA02-DFA0A04FC94B}">
-              <ma14:wrappingTextBoxFlag xmlns="" xmlns:ma14="http://schemas.microsoft.com/office/mac/drawingml/2011/main" val="0"/>
+              <ma14:wrappingTextBoxFlag xmlns:ma14="http://schemas.microsoft.com/office/mac/drawingml/2011/main" xmlns="" val="0"/>
             </a:ext>
           </a:extLst>
         </p:spPr>
@@ -12031,7 +11947,7 @@
           </a:prstGeom>
           <a:extLst>
             <a:ext uri="{C572A759-6A51-4108-AA02-DFA0A04FC94B}">
-              <ma14:wrappingTextBoxFlag xmlns="" xmlns:ma14="http://schemas.microsoft.com/office/mac/drawingml/2011/main" val="0"/>
+              <ma14:wrappingTextBoxFlag xmlns:ma14="http://schemas.microsoft.com/office/mac/drawingml/2011/main" xmlns="" val="0"/>
             </a:ext>
           </a:extLst>
         </p:spPr>
@@ -13004,7 +12920,7 @@
           </a:prstGeom>
           <a:extLst>
             <a:ext uri="{C572A759-6A51-4108-AA02-DFA0A04FC94B}">
-              <ma14:wrappingTextBoxFlag xmlns="" xmlns:ma14="http://schemas.microsoft.com/office/mac/drawingml/2011/main" val="0"/>
+              <ma14:wrappingTextBoxFlag xmlns:ma14="http://schemas.microsoft.com/office/mac/drawingml/2011/main" xmlns="" val="0"/>
             </a:ext>
           </a:extLst>
         </p:spPr>
@@ -13561,7 +13477,7 @@
           </a:prstGeom>
           <a:extLst>
             <a:ext uri="{C572A759-6A51-4108-AA02-DFA0A04FC94B}">
-              <ma14:wrappingTextBoxFlag xmlns="" xmlns:ma14="http://schemas.microsoft.com/office/mac/drawingml/2011/main" val="0"/>
+              <ma14:wrappingTextBoxFlag xmlns:ma14="http://schemas.microsoft.com/office/mac/drawingml/2011/main" xmlns="" val="0"/>
             </a:ext>
           </a:extLst>
         </p:spPr>
@@ -13596,7 +13512,7 @@
 
 <file path=ppt/slides/slide2.xml><?xml version="1.0" encoding="utf-8"?>
 <p:sld xmlns:a="http://schemas.openxmlformats.org/drawingml/2006/main" xmlns:r="http://schemas.openxmlformats.org/officeDocument/2006/relationships" xmlns:p="http://schemas.openxmlformats.org/presentationml/2006/main">
-  <p:cSld name="Slide 2">
+  <p:cSld>
     <p:spTree>
       <p:nvGrpSpPr>
         <p:cNvPr id="1" name=""/>
@@ -13613,14 +13529,1928 @@
       </p:grpSpPr>
       <p:sp>
         <p:nvSpPr>
-          <p:cNvPr id="2" name="Text 0"/>
+          <p:cNvPr id="6" name="TextBox 5"/>
+          <p:cNvSpPr txBox="1"/>
+          <p:nvPr/>
+        </p:nvSpPr>
+        <p:spPr>
+          <a:xfrm>
+            <a:off x="397764" y="754380"/>
+            <a:ext cx="8229600" cy="175433"/>
+          </a:xfrm>
+          <a:prstGeom prst="rect">
+            <a:avLst/>
+          </a:prstGeom>
+          <a:noFill/>
+        </p:spPr>
+        <p:txBody>
+          <a:bodyPr wrap="square" lIns="27432" tIns="6858" rIns="27432" bIns="6858">
+            <a:spAutoFit/>
+          </a:bodyPr>
+          <a:lstStyle/>
+          <a:p>
+            <a:pPr algn="l"/>
+            <a:r>
+              <a:rPr lang="en-US" sz="1050" dirty="0">
+                <a:solidFill>
+                  <a:srgbClr val="5B6D7C"/>
+                </a:solidFill>
+                <a:latin typeface="Aptos"/>
+              </a:rPr>
+              <a:t>                                                        </a:t>
+            </a:r>
+            <a:r>
+              <a:rPr sz="1050" dirty="0">
+                <a:solidFill>
+                  <a:srgbClr val="5B6D7C"/>
+                </a:solidFill>
+                <a:latin typeface="Aptos"/>
+              </a:rPr>
+              <a:t>Centralized monitoring for Docker hosts and containers — from one web dashboard</a:t>
+            </a:r>
+          </a:p>
+        </p:txBody>
+      </p:sp>
+      <p:sp>
+        <p:nvSpPr>
+          <p:cNvPr id="7" name="Rounded Rectangle 6"/>
           <p:cNvSpPr/>
           <p:nvPr/>
         </p:nvSpPr>
         <p:spPr>
           <a:xfrm>
-            <a:off x="170180" y="114300"/>
-            <a:ext cx="7119620" cy="909828"/>
+            <a:off x="377190" y="1083564"/>
+            <a:ext cx="8380476" cy="706374"/>
+          </a:xfrm>
+          <a:prstGeom prst="roundRect">
+            <a:avLst/>
+          </a:prstGeom>
+          <a:solidFill>
+            <a:srgbClr val="FFFFFF"/>
+          </a:solidFill>
+          <a:ln>
+            <a:solidFill>
+              <a:srgbClr val="D0E0E8"/>
+            </a:solidFill>
+          </a:ln>
+        </p:spPr>
+        <p:style>
+          <a:lnRef idx="1">
+            <a:schemeClr val="accent1"/>
+          </a:lnRef>
+          <a:fillRef idx="3">
+            <a:schemeClr val="accent1"/>
+          </a:fillRef>
+          <a:effectRef idx="2">
+            <a:schemeClr val="accent1"/>
+          </a:effectRef>
+          <a:fontRef idx="minor">
+            <a:schemeClr val="lt1"/>
+          </a:fontRef>
+        </p:style>
+        <p:txBody>
+          <a:bodyPr rtlCol="0" anchor="ctr"/>
+          <a:lstStyle/>
+          <a:p>
+            <a:pPr algn="ctr"/>
+            <a:endParaRPr sz="1350"/>
+          </a:p>
+        </p:txBody>
+      </p:sp>
+      <p:sp>
+        <p:nvSpPr>
+          <p:cNvPr id="8" name="TextBox 7"/>
+          <p:cNvSpPr txBox="1"/>
+          <p:nvPr/>
+        </p:nvSpPr>
+        <p:spPr>
+          <a:xfrm>
+            <a:off x="473202" y="1179576"/>
+            <a:ext cx="1923669" cy="229294"/>
+          </a:xfrm>
+          <a:prstGeom prst="rect">
+            <a:avLst/>
+          </a:prstGeom>
+          <a:noFill/>
+        </p:spPr>
+        <p:txBody>
+          <a:bodyPr wrap="square" lIns="27432" tIns="6858" rIns="27432" bIns="6858">
+            <a:spAutoFit/>
+          </a:bodyPr>
+          <a:lstStyle/>
+          <a:p>
+            <a:pPr algn="l"/>
+            <a:r>
+              <a:rPr sz="1400" b="1" dirty="0">
+                <a:solidFill>
+                  <a:srgbClr val="00A0B4"/>
+                </a:solidFill>
+                <a:latin typeface="Aptos"/>
+              </a:rPr>
+              <a:t>DOMAIN</a:t>
+            </a:r>
+          </a:p>
+        </p:txBody>
+      </p:sp>
+      <p:sp>
+        <p:nvSpPr>
+          <p:cNvPr id="9" name="TextBox 8"/>
+          <p:cNvSpPr txBox="1"/>
+          <p:nvPr/>
+        </p:nvSpPr>
+        <p:spPr>
+          <a:xfrm>
+            <a:off x="473202" y="1344168"/>
+            <a:ext cx="1923669" cy="198516"/>
+          </a:xfrm>
+          <a:prstGeom prst="rect">
+            <a:avLst/>
+          </a:prstGeom>
+          <a:noFill/>
+        </p:spPr>
+        <p:txBody>
+          <a:bodyPr wrap="square" lIns="27432" tIns="6858" rIns="27432" bIns="6858">
+            <a:spAutoFit/>
+          </a:bodyPr>
+          <a:lstStyle/>
+          <a:p>
+            <a:pPr algn="l"/>
+            <a:r>
+              <a:rPr sz="1200" b="1" dirty="0">
+                <a:solidFill>
+                  <a:srgbClr val="202D3A"/>
+                </a:solidFill>
+                <a:latin typeface="Aptos"/>
+              </a:rPr>
+              <a:t>IT Operations &amp; DevOps</a:t>
+            </a:r>
+          </a:p>
+        </p:txBody>
+      </p:sp>
+      <p:sp>
+        <p:nvSpPr>
+          <p:cNvPr id="10" name="Rectangle 9"/>
+          <p:cNvSpPr/>
+          <p:nvPr/>
+        </p:nvSpPr>
+        <p:spPr>
+          <a:xfrm>
+            <a:off x="2472309" y="1220724"/>
+            <a:ext cx="8229" cy="425196"/>
+          </a:xfrm>
+          <a:prstGeom prst="rect">
+            <a:avLst/>
+          </a:prstGeom>
+          <a:solidFill>
+            <a:srgbClr val="D0E0E8"/>
+          </a:solidFill>
+          <a:ln>
+            <a:noFill/>
+          </a:ln>
+        </p:spPr>
+        <p:style>
+          <a:lnRef idx="1">
+            <a:schemeClr val="accent1"/>
+          </a:lnRef>
+          <a:fillRef idx="3">
+            <a:schemeClr val="accent1"/>
+          </a:fillRef>
+          <a:effectRef idx="2">
+            <a:schemeClr val="accent1"/>
+          </a:effectRef>
+          <a:fontRef idx="minor">
+            <a:schemeClr val="lt1"/>
+          </a:fontRef>
+        </p:style>
+        <p:txBody>
+          <a:bodyPr rtlCol="0" anchor="ctr"/>
+          <a:lstStyle/>
+          <a:p>
+            <a:pPr algn="ctr"/>
+            <a:endParaRPr sz="1350"/>
+          </a:p>
+        </p:txBody>
+      </p:sp>
+      <p:sp>
+        <p:nvSpPr>
+          <p:cNvPr id="11" name="TextBox 10"/>
+          <p:cNvSpPr txBox="1"/>
+          <p:nvPr/>
+        </p:nvSpPr>
+        <p:spPr>
+          <a:xfrm>
+            <a:off x="2568321" y="1179576"/>
+            <a:ext cx="1923669" cy="198516"/>
+          </a:xfrm>
+          <a:prstGeom prst="rect">
+            <a:avLst/>
+          </a:prstGeom>
+          <a:noFill/>
+        </p:spPr>
+        <p:txBody>
+          <a:bodyPr wrap="square" lIns="27432" tIns="6858" rIns="27432" bIns="6858">
+            <a:spAutoFit/>
+          </a:bodyPr>
+          <a:lstStyle/>
+          <a:p>
+            <a:pPr algn="l"/>
+            <a:r>
+              <a:rPr sz="1200" b="1" dirty="0">
+                <a:solidFill>
+                  <a:srgbClr val="00A0B4"/>
+                </a:solidFill>
+                <a:latin typeface="Aptos"/>
+              </a:rPr>
+              <a:t>USE CASE</a:t>
+            </a:r>
+          </a:p>
+        </p:txBody>
+      </p:sp>
+      <p:sp>
+        <p:nvSpPr>
+          <p:cNvPr id="12" name="TextBox 11"/>
+          <p:cNvSpPr txBox="1"/>
+          <p:nvPr/>
+        </p:nvSpPr>
+        <p:spPr>
+          <a:xfrm>
+            <a:off x="2568321" y="1344168"/>
+            <a:ext cx="1923669" cy="183127"/>
+          </a:xfrm>
+          <a:prstGeom prst="rect">
+            <a:avLst/>
+          </a:prstGeom>
+          <a:noFill/>
+        </p:spPr>
+        <p:txBody>
+          <a:bodyPr wrap="square" lIns="27432" tIns="6858" rIns="27432" bIns="6858">
+            <a:spAutoFit/>
+          </a:bodyPr>
+          <a:lstStyle/>
+          <a:p>
+            <a:pPr algn="l"/>
+            <a:r>
+              <a:rPr sz="1100" b="1" dirty="0">
+                <a:solidFill>
+                  <a:srgbClr val="202D3A"/>
+                </a:solidFill>
+                <a:latin typeface="Aptos"/>
+              </a:rPr>
+              <a:t>Host + container monitoring</a:t>
+            </a:r>
+          </a:p>
+        </p:txBody>
+      </p:sp>
+      <p:sp>
+        <p:nvSpPr>
+          <p:cNvPr id="13" name="Rectangle 12"/>
+          <p:cNvSpPr/>
+          <p:nvPr/>
+        </p:nvSpPr>
+        <p:spPr>
+          <a:xfrm>
+            <a:off x="4567428" y="1220724"/>
+            <a:ext cx="8229" cy="425196"/>
+          </a:xfrm>
+          <a:prstGeom prst="rect">
+            <a:avLst/>
+          </a:prstGeom>
+          <a:solidFill>
+            <a:srgbClr val="D0E0E8"/>
+          </a:solidFill>
+          <a:ln>
+            <a:noFill/>
+          </a:ln>
+        </p:spPr>
+        <p:style>
+          <a:lnRef idx="1">
+            <a:schemeClr val="accent1"/>
+          </a:lnRef>
+          <a:fillRef idx="3">
+            <a:schemeClr val="accent1"/>
+          </a:fillRef>
+          <a:effectRef idx="2">
+            <a:schemeClr val="accent1"/>
+          </a:effectRef>
+          <a:fontRef idx="minor">
+            <a:schemeClr val="lt1"/>
+          </a:fontRef>
+        </p:style>
+        <p:txBody>
+          <a:bodyPr rtlCol="0" anchor="ctr"/>
+          <a:lstStyle/>
+          <a:p>
+            <a:pPr algn="ctr"/>
+            <a:endParaRPr sz="1350"/>
+          </a:p>
+        </p:txBody>
+      </p:sp>
+      <p:sp>
+        <p:nvSpPr>
+          <p:cNvPr id="14" name="TextBox 13"/>
+          <p:cNvSpPr txBox="1"/>
+          <p:nvPr/>
+        </p:nvSpPr>
+        <p:spPr>
+          <a:xfrm>
+            <a:off x="4663440" y="1179576"/>
+            <a:ext cx="1923669" cy="198516"/>
+          </a:xfrm>
+          <a:prstGeom prst="rect">
+            <a:avLst/>
+          </a:prstGeom>
+          <a:noFill/>
+        </p:spPr>
+        <p:txBody>
+          <a:bodyPr wrap="square" lIns="27432" tIns="6858" rIns="27432" bIns="6858">
+            <a:spAutoFit/>
+          </a:bodyPr>
+          <a:lstStyle/>
+          <a:p>
+            <a:pPr algn="l"/>
+            <a:r>
+              <a:rPr sz="1200" b="1" dirty="0">
+                <a:solidFill>
+                  <a:srgbClr val="00A0B4"/>
+                </a:solidFill>
+                <a:latin typeface="Aptos"/>
+              </a:rPr>
+              <a:t>BUSINESS NEED</a:t>
+            </a:r>
+          </a:p>
+        </p:txBody>
+      </p:sp>
+      <p:sp>
+        <p:nvSpPr>
+          <p:cNvPr id="15" name="TextBox 14"/>
+          <p:cNvSpPr txBox="1"/>
+          <p:nvPr/>
+        </p:nvSpPr>
+        <p:spPr>
+          <a:xfrm>
+            <a:off x="4663440" y="1344168"/>
+            <a:ext cx="1923669" cy="352404"/>
+          </a:xfrm>
+          <a:prstGeom prst="rect">
+            <a:avLst/>
+          </a:prstGeom>
+          <a:noFill/>
+        </p:spPr>
+        <p:txBody>
+          <a:bodyPr wrap="square" lIns="27432" tIns="6858" rIns="27432" bIns="6858">
+            <a:spAutoFit/>
+          </a:bodyPr>
+          <a:lstStyle/>
+          <a:p>
+            <a:pPr algn="l"/>
+            <a:r>
+              <a:rPr sz="1100" b="1" dirty="0">
+                <a:solidFill>
+                  <a:srgbClr val="202D3A"/>
+                </a:solidFill>
+                <a:latin typeface="Aptos"/>
+              </a:rPr>
+              <a:t>One health view; less manual inspection</a:t>
+            </a:r>
+          </a:p>
+        </p:txBody>
+      </p:sp>
+      <p:sp>
+        <p:nvSpPr>
+          <p:cNvPr id="16" name="Rectangle 15"/>
+          <p:cNvSpPr/>
+          <p:nvPr/>
+        </p:nvSpPr>
+        <p:spPr>
+          <a:xfrm>
+            <a:off x="6662547" y="1220724"/>
+            <a:ext cx="8229" cy="425196"/>
+          </a:xfrm>
+          <a:prstGeom prst="rect">
+            <a:avLst/>
+          </a:prstGeom>
+          <a:solidFill>
+            <a:srgbClr val="D0E0E8"/>
+          </a:solidFill>
+          <a:ln>
+            <a:noFill/>
+          </a:ln>
+        </p:spPr>
+        <p:style>
+          <a:lnRef idx="1">
+            <a:schemeClr val="accent1"/>
+          </a:lnRef>
+          <a:fillRef idx="3">
+            <a:schemeClr val="accent1"/>
+          </a:fillRef>
+          <a:effectRef idx="2">
+            <a:schemeClr val="accent1"/>
+          </a:effectRef>
+          <a:fontRef idx="minor">
+            <a:schemeClr val="lt1"/>
+          </a:fontRef>
+        </p:style>
+        <p:txBody>
+          <a:bodyPr rtlCol="0" anchor="ctr"/>
+          <a:lstStyle/>
+          <a:p>
+            <a:pPr algn="ctr"/>
+            <a:endParaRPr sz="1350"/>
+          </a:p>
+        </p:txBody>
+      </p:sp>
+      <p:sp>
+        <p:nvSpPr>
+          <p:cNvPr id="17" name="TextBox 16"/>
+          <p:cNvSpPr txBox="1"/>
+          <p:nvPr/>
+        </p:nvSpPr>
+        <p:spPr>
+          <a:xfrm>
+            <a:off x="6758559" y="1179576"/>
+            <a:ext cx="1923669" cy="198516"/>
+          </a:xfrm>
+          <a:prstGeom prst="rect">
+            <a:avLst/>
+          </a:prstGeom>
+          <a:noFill/>
+        </p:spPr>
+        <p:txBody>
+          <a:bodyPr wrap="square" lIns="27432" tIns="6858" rIns="27432" bIns="6858">
+            <a:spAutoFit/>
+          </a:bodyPr>
+          <a:lstStyle/>
+          <a:p>
+            <a:pPr algn="l"/>
+            <a:r>
+              <a:rPr lang="en-IN" sz="1200" b="1" dirty="0">
+                <a:solidFill>
+                  <a:srgbClr val="00A0B4"/>
+                </a:solidFill>
+                <a:latin typeface="Aptos"/>
+              </a:rPr>
+              <a:t>OBJECTIVE</a:t>
+            </a:r>
+          </a:p>
+        </p:txBody>
+      </p:sp>
+      <p:sp>
+        <p:nvSpPr>
+          <p:cNvPr id="18" name="TextBox 17"/>
+          <p:cNvSpPr txBox="1"/>
+          <p:nvPr/>
+        </p:nvSpPr>
+        <p:spPr>
+          <a:xfrm>
+            <a:off x="6758559" y="1344168"/>
+            <a:ext cx="1923669" cy="352404"/>
+          </a:xfrm>
+          <a:prstGeom prst="rect">
+            <a:avLst/>
+          </a:prstGeom>
+          <a:noFill/>
+        </p:spPr>
+        <p:txBody>
+          <a:bodyPr wrap="square" lIns="27432" tIns="6858" rIns="27432" bIns="6858">
+            <a:spAutoFit/>
+          </a:bodyPr>
+          <a:lstStyle/>
+          <a:p>
+            <a:pPr algn="l"/>
+            <a:r>
+              <a:rPr lang="en-US" sz="1100" b="1" dirty="0">
+                <a:solidFill>
+                  <a:srgbClr val="202D3A"/>
+                </a:solidFill>
+                <a:latin typeface="Aptos"/>
+              </a:rPr>
+              <a:t>Reliable monitoring on AWS EC2</a:t>
+            </a:r>
+          </a:p>
+        </p:txBody>
+      </p:sp>
+      <p:sp>
+        <p:nvSpPr>
+          <p:cNvPr id="19" name="TextBox 18"/>
+          <p:cNvSpPr txBox="1"/>
+          <p:nvPr/>
+        </p:nvSpPr>
+        <p:spPr>
+          <a:xfrm>
+            <a:off x="397764" y="1885950"/>
+            <a:ext cx="8229600" cy="198516"/>
+          </a:xfrm>
+          <a:prstGeom prst="rect">
+            <a:avLst/>
+          </a:prstGeom>
+          <a:noFill/>
+        </p:spPr>
+        <p:txBody>
+          <a:bodyPr wrap="square" lIns="27432" tIns="6858" rIns="27432" bIns="6858">
+            <a:spAutoFit/>
+          </a:bodyPr>
+          <a:lstStyle/>
+          <a:p>
+            <a:pPr algn="l"/>
+            <a:r>
+              <a:rPr sz="1200" b="1" dirty="0">
+                <a:solidFill>
+                  <a:srgbClr val="0F233A"/>
+                </a:solidFill>
+                <a:latin typeface="Aptos"/>
+              </a:rPr>
+              <a:t>TECHNOLOGY &amp; AWS IMPLEMENTATION</a:t>
+            </a:r>
+          </a:p>
+        </p:txBody>
+      </p:sp>
+      <p:sp>
+        <p:nvSpPr>
+          <p:cNvPr id="20" name="Rounded Rectangle 19"/>
+          <p:cNvSpPr/>
+          <p:nvPr/>
+        </p:nvSpPr>
+        <p:spPr>
+          <a:xfrm>
+            <a:off x="377190" y="2112264"/>
+            <a:ext cx="8380476" cy="589788"/>
+          </a:xfrm>
+          <a:prstGeom prst="roundRect">
+            <a:avLst/>
+          </a:prstGeom>
+          <a:solidFill>
+            <a:srgbClr val="E2F1F7"/>
+          </a:solidFill>
+          <a:ln>
+            <a:noFill/>
+          </a:ln>
+        </p:spPr>
+        <p:style>
+          <a:lnRef idx="1">
+            <a:schemeClr val="accent1"/>
+          </a:lnRef>
+          <a:fillRef idx="3">
+            <a:schemeClr val="accent1"/>
+          </a:fillRef>
+          <a:effectRef idx="2">
+            <a:schemeClr val="accent1"/>
+          </a:effectRef>
+          <a:fontRef idx="minor">
+            <a:schemeClr val="lt1"/>
+          </a:fontRef>
+        </p:style>
+        <p:txBody>
+          <a:bodyPr rtlCol="0" anchor="ctr"/>
+          <a:lstStyle/>
+          <a:p>
+            <a:pPr algn="ctr"/>
+            <a:endParaRPr sz="1350"/>
+          </a:p>
+        </p:txBody>
+      </p:sp>
+      <p:sp>
+        <p:nvSpPr>
+          <p:cNvPr id="21" name="TextBox 20"/>
+          <p:cNvSpPr txBox="1"/>
+          <p:nvPr/>
+        </p:nvSpPr>
+        <p:spPr>
+          <a:xfrm>
+            <a:off x="459486" y="2187703"/>
+            <a:ext cx="1957959" cy="198516"/>
+          </a:xfrm>
+          <a:prstGeom prst="rect">
+            <a:avLst/>
+          </a:prstGeom>
+          <a:noFill/>
+        </p:spPr>
+        <p:txBody>
+          <a:bodyPr wrap="square" lIns="27432" tIns="6858" rIns="27432" bIns="6858">
+            <a:spAutoFit/>
+          </a:bodyPr>
+          <a:lstStyle/>
+          <a:p>
+            <a:pPr algn="l"/>
+            <a:r>
+              <a:rPr sz="1200" b="1" dirty="0">
+                <a:solidFill>
+                  <a:srgbClr val="00A0B4"/>
+                </a:solidFill>
+                <a:latin typeface="Aptos"/>
+              </a:rPr>
+              <a:t>APPLICATION</a:t>
+            </a:r>
+          </a:p>
+        </p:txBody>
+      </p:sp>
+      <p:sp>
+        <p:nvSpPr>
+          <p:cNvPr id="22" name="TextBox 21"/>
+          <p:cNvSpPr txBox="1"/>
+          <p:nvPr/>
+        </p:nvSpPr>
+        <p:spPr>
+          <a:xfrm>
+            <a:off x="459486" y="2345436"/>
+            <a:ext cx="1957959" cy="152349"/>
+          </a:xfrm>
+          <a:prstGeom prst="rect">
+            <a:avLst/>
+          </a:prstGeom>
+          <a:noFill/>
+        </p:spPr>
+        <p:txBody>
+          <a:bodyPr wrap="square" lIns="27432" tIns="6858" rIns="27432" bIns="6858">
+            <a:spAutoFit/>
+          </a:bodyPr>
+          <a:lstStyle/>
+          <a:p>
+            <a:pPr algn="l"/>
+            <a:r>
+              <a:rPr sz="900" b="1" dirty="0">
+                <a:solidFill>
+                  <a:srgbClr val="202D3A"/>
+                </a:solidFill>
+                <a:latin typeface="Aptos"/>
+              </a:rPr>
+              <a:t>React · TypeScript · Vite · Tailwind</a:t>
+            </a:r>
+          </a:p>
+        </p:txBody>
+      </p:sp>
+      <p:sp>
+        <p:nvSpPr>
+          <p:cNvPr id="23" name="TextBox 22"/>
+          <p:cNvSpPr txBox="1"/>
+          <p:nvPr/>
+        </p:nvSpPr>
+        <p:spPr>
+          <a:xfrm>
+            <a:off x="2554605" y="2187703"/>
+            <a:ext cx="1957959" cy="198516"/>
+          </a:xfrm>
+          <a:prstGeom prst="rect">
+            <a:avLst/>
+          </a:prstGeom>
+          <a:noFill/>
+        </p:spPr>
+        <p:txBody>
+          <a:bodyPr wrap="square" lIns="27432" tIns="6858" rIns="27432" bIns="6858">
+            <a:spAutoFit/>
+          </a:bodyPr>
+          <a:lstStyle/>
+          <a:p>
+            <a:pPr algn="l"/>
+            <a:r>
+              <a:rPr sz="1200" b="1" dirty="0">
+                <a:solidFill>
+                  <a:srgbClr val="00A0B4"/>
+                </a:solidFill>
+                <a:latin typeface="Aptos"/>
+              </a:rPr>
+              <a:t>METRICS</a:t>
+            </a:r>
+          </a:p>
+        </p:txBody>
+      </p:sp>
+      <p:sp>
+        <p:nvSpPr>
+          <p:cNvPr id="24" name="TextBox 23"/>
+          <p:cNvSpPr txBox="1"/>
+          <p:nvPr/>
+        </p:nvSpPr>
+        <p:spPr>
+          <a:xfrm>
+            <a:off x="2554605" y="2345436"/>
+            <a:ext cx="1957959" cy="136961"/>
+          </a:xfrm>
+          <a:prstGeom prst="rect">
+            <a:avLst/>
+          </a:prstGeom>
+          <a:noFill/>
+        </p:spPr>
+        <p:txBody>
+          <a:bodyPr wrap="square" lIns="27432" tIns="6858" rIns="27432" bIns="6858">
+            <a:spAutoFit/>
+          </a:bodyPr>
+          <a:lstStyle/>
+          <a:p>
+            <a:pPr algn="l"/>
+            <a:r>
+              <a:rPr sz="800" b="1" dirty="0">
+                <a:solidFill>
+                  <a:srgbClr val="202D3A"/>
+                </a:solidFill>
+                <a:latin typeface="Aptos"/>
+              </a:rPr>
+              <a:t>Prometheus · Node Exporter · </a:t>
+            </a:r>
+            <a:r>
+              <a:rPr sz="800" b="1" dirty="0" err="1">
+                <a:solidFill>
+                  <a:srgbClr val="202D3A"/>
+                </a:solidFill>
+                <a:latin typeface="Aptos"/>
+              </a:rPr>
+              <a:t>cAdvisor</a:t>
+            </a:r>
+            <a:endParaRPr sz="800" b="1" dirty="0">
+              <a:solidFill>
+                <a:srgbClr val="202D3A"/>
+              </a:solidFill>
+              <a:latin typeface="Aptos"/>
+            </a:endParaRPr>
+          </a:p>
+        </p:txBody>
+      </p:sp>
+      <p:sp>
+        <p:nvSpPr>
+          <p:cNvPr id="25" name="TextBox 24"/>
+          <p:cNvSpPr txBox="1"/>
+          <p:nvPr/>
+        </p:nvSpPr>
+        <p:spPr>
+          <a:xfrm>
+            <a:off x="4649724" y="2187703"/>
+            <a:ext cx="1957959" cy="198516"/>
+          </a:xfrm>
+          <a:prstGeom prst="rect">
+            <a:avLst/>
+          </a:prstGeom>
+          <a:noFill/>
+        </p:spPr>
+        <p:txBody>
+          <a:bodyPr wrap="square" lIns="27432" tIns="6858" rIns="27432" bIns="6858">
+            <a:spAutoFit/>
+          </a:bodyPr>
+          <a:lstStyle/>
+          <a:p>
+            <a:pPr algn="l"/>
+            <a:r>
+              <a:rPr sz="1200" b="1" dirty="0">
+                <a:solidFill>
+                  <a:srgbClr val="00A0B4"/>
+                </a:solidFill>
+                <a:latin typeface="Aptos"/>
+              </a:rPr>
+              <a:t>VISUALIZATION</a:t>
+            </a:r>
+          </a:p>
+        </p:txBody>
+      </p:sp>
+      <p:sp>
+        <p:nvSpPr>
+          <p:cNvPr id="26" name="TextBox 25"/>
+          <p:cNvSpPr txBox="1"/>
+          <p:nvPr/>
+        </p:nvSpPr>
+        <p:spPr>
+          <a:xfrm>
+            <a:off x="4649724" y="2345436"/>
+            <a:ext cx="1957959" cy="152349"/>
+          </a:xfrm>
+          <a:prstGeom prst="rect">
+            <a:avLst/>
+          </a:prstGeom>
+          <a:noFill/>
+        </p:spPr>
+        <p:txBody>
+          <a:bodyPr wrap="square" lIns="27432" tIns="6858" rIns="27432" bIns="6858">
+            <a:spAutoFit/>
+          </a:bodyPr>
+          <a:lstStyle/>
+          <a:p>
+            <a:pPr algn="l"/>
+            <a:r>
+              <a:rPr sz="900" b="1" dirty="0">
+                <a:solidFill>
+                  <a:srgbClr val="202D3A"/>
+                </a:solidFill>
+                <a:latin typeface="Aptos"/>
+              </a:rPr>
+              <a:t>Grafana · </a:t>
+            </a:r>
+            <a:r>
+              <a:rPr sz="900" b="1" dirty="0" err="1">
+                <a:solidFill>
+                  <a:srgbClr val="202D3A"/>
+                </a:solidFill>
+                <a:latin typeface="Aptos"/>
+              </a:rPr>
+              <a:t>Alertmanager</a:t>
+            </a:r>
+            <a:endParaRPr sz="900" b="1" dirty="0">
+              <a:solidFill>
+                <a:srgbClr val="202D3A"/>
+              </a:solidFill>
+              <a:latin typeface="Aptos"/>
+            </a:endParaRPr>
+          </a:p>
+        </p:txBody>
+      </p:sp>
+      <p:sp>
+        <p:nvSpPr>
+          <p:cNvPr id="27" name="TextBox 26"/>
+          <p:cNvSpPr txBox="1"/>
+          <p:nvPr/>
+        </p:nvSpPr>
+        <p:spPr>
+          <a:xfrm>
+            <a:off x="6744843" y="2187703"/>
+            <a:ext cx="1957959" cy="198516"/>
+          </a:xfrm>
+          <a:prstGeom prst="rect">
+            <a:avLst/>
+          </a:prstGeom>
+          <a:noFill/>
+        </p:spPr>
+        <p:txBody>
+          <a:bodyPr wrap="square" lIns="27432" tIns="6858" rIns="27432" bIns="6858">
+            <a:spAutoFit/>
+          </a:bodyPr>
+          <a:lstStyle/>
+          <a:p>
+            <a:pPr algn="l"/>
+            <a:r>
+              <a:rPr sz="1200" b="1" dirty="0">
+                <a:solidFill>
+                  <a:srgbClr val="00A0B4"/>
+                </a:solidFill>
+                <a:latin typeface="Aptos"/>
+              </a:rPr>
+              <a:t>AWS / DEPLOYMENT</a:t>
+            </a:r>
+          </a:p>
+        </p:txBody>
+      </p:sp>
+      <p:sp>
+        <p:nvSpPr>
+          <p:cNvPr id="28" name="TextBox 27"/>
+          <p:cNvSpPr txBox="1"/>
+          <p:nvPr/>
+        </p:nvSpPr>
+        <p:spPr>
+          <a:xfrm>
+            <a:off x="6744843" y="2345436"/>
+            <a:ext cx="1957959" cy="260071"/>
+          </a:xfrm>
+          <a:prstGeom prst="rect">
+            <a:avLst/>
+          </a:prstGeom>
+          <a:noFill/>
+        </p:spPr>
+        <p:txBody>
+          <a:bodyPr wrap="square" lIns="27432" tIns="6858" rIns="27432" bIns="6858">
+            <a:spAutoFit/>
+          </a:bodyPr>
+          <a:lstStyle/>
+          <a:p>
+            <a:pPr algn="l"/>
+            <a:r>
+              <a:rPr sz="800" b="1" dirty="0">
+                <a:solidFill>
+                  <a:srgbClr val="202D3A"/>
+                </a:solidFill>
+                <a:latin typeface="Aptos"/>
+              </a:rPr>
+              <a:t>EC2 Ubuntu · Docker Compose · IAM · Security Groups · EBS</a:t>
+            </a:r>
+          </a:p>
+        </p:txBody>
+      </p:sp>
+      <p:sp>
+        <p:nvSpPr>
+          <p:cNvPr id="29" name="TextBox 28"/>
+          <p:cNvSpPr txBox="1"/>
+          <p:nvPr/>
+        </p:nvSpPr>
+        <p:spPr>
+          <a:xfrm>
+            <a:off x="397764" y="2756915"/>
+            <a:ext cx="8229600" cy="198516"/>
+          </a:xfrm>
+          <a:prstGeom prst="rect">
+            <a:avLst/>
+          </a:prstGeom>
+          <a:noFill/>
+        </p:spPr>
+        <p:txBody>
+          <a:bodyPr wrap="square" lIns="27432" tIns="6858" rIns="27432" bIns="6858">
+            <a:spAutoFit/>
+          </a:bodyPr>
+          <a:lstStyle/>
+          <a:p>
+            <a:pPr algn="l"/>
+            <a:r>
+              <a:rPr sz="1200" b="1" dirty="0">
+                <a:solidFill>
+                  <a:srgbClr val="0F233A"/>
+                </a:solidFill>
+                <a:latin typeface="Aptos"/>
+              </a:rPr>
+              <a:t>TEAM RESPONSIBILITIES  |  THREE WORKSTREAMS</a:t>
+            </a:r>
+          </a:p>
+        </p:txBody>
+      </p:sp>
+      <p:sp>
+        <p:nvSpPr>
+          <p:cNvPr id="30" name="Rounded Rectangle 29"/>
+          <p:cNvSpPr/>
+          <p:nvPr/>
+        </p:nvSpPr>
+        <p:spPr>
+          <a:xfrm>
+            <a:off x="377190" y="3003804"/>
+            <a:ext cx="2729484" cy="1831086"/>
+          </a:xfrm>
+          <a:prstGeom prst="roundRect">
+            <a:avLst/>
+          </a:prstGeom>
+          <a:solidFill>
+            <a:srgbClr val="FFFFFF"/>
+          </a:solidFill>
+          <a:ln>
+            <a:solidFill>
+              <a:srgbClr val="D0E0E8"/>
+            </a:solidFill>
+          </a:ln>
+        </p:spPr>
+        <p:style>
+          <a:lnRef idx="1">
+            <a:schemeClr val="accent1"/>
+          </a:lnRef>
+          <a:fillRef idx="3">
+            <a:schemeClr val="accent1"/>
+          </a:fillRef>
+          <a:effectRef idx="2">
+            <a:schemeClr val="accent1"/>
+          </a:effectRef>
+          <a:fontRef idx="minor">
+            <a:schemeClr val="lt1"/>
+          </a:fontRef>
+        </p:style>
+        <p:txBody>
+          <a:bodyPr rtlCol="0" anchor="ctr"/>
+          <a:lstStyle/>
+          <a:p>
+            <a:pPr algn="ctr"/>
+            <a:endParaRPr sz="1350"/>
+          </a:p>
+        </p:txBody>
+      </p:sp>
+      <p:sp>
+        <p:nvSpPr>
+          <p:cNvPr id="31" name="Rounded Rectangle 30"/>
+          <p:cNvSpPr/>
+          <p:nvPr/>
+        </p:nvSpPr>
+        <p:spPr>
+          <a:xfrm>
+            <a:off x="377190" y="3003804"/>
+            <a:ext cx="2729484" cy="500267"/>
+          </a:xfrm>
+          <a:prstGeom prst="roundRect">
+            <a:avLst/>
+          </a:prstGeom>
+          <a:solidFill>
+            <a:srgbClr val="00A0B4"/>
+          </a:solidFill>
+          <a:ln>
+            <a:noFill/>
+          </a:ln>
+        </p:spPr>
+        <p:style>
+          <a:lnRef idx="1">
+            <a:schemeClr val="accent1"/>
+          </a:lnRef>
+          <a:fillRef idx="3">
+            <a:schemeClr val="accent1"/>
+          </a:fillRef>
+          <a:effectRef idx="2">
+            <a:schemeClr val="accent1"/>
+          </a:effectRef>
+          <a:fontRef idx="minor">
+            <a:schemeClr val="lt1"/>
+          </a:fontRef>
+        </p:style>
+        <p:txBody>
+          <a:bodyPr rtlCol="0" anchor="ctr"/>
+          <a:lstStyle/>
+          <a:p>
+            <a:pPr algn="ctr"/>
+            <a:endParaRPr sz="1350"/>
+          </a:p>
+        </p:txBody>
+      </p:sp>
+      <p:sp>
+        <p:nvSpPr>
+          <p:cNvPr id="33" name="TextBox 32"/>
+          <p:cNvSpPr txBox="1"/>
+          <p:nvPr/>
+        </p:nvSpPr>
+        <p:spPr>
+          <a:xfrm>
+            <a:off x="774953" y="3092958"/>
+            <a:ext cx="2235708" cy="875624"/>
+          </a:xfrm>
+          <a:prstGeom prst="rect">
+            <a:avLst/>
+          </a:prstGeom>
+          <a:noFill/>
+        </p:spPr>
+        <p:txBody>
+          <a:bodyPr wrap="square" lIns="27432" tIns="6858" rIns="27432" bIns="6858">
+            <a:spAutoFit/>
+          </a:bodyPr>
+          <a:lstStyle/>
+          <a:p>
+            <a:pPr algn="l"/>
+            <a:r>
+              <a:rPr lang="en-US" sz="1400" b="1" dirty="0">
+                <a:solidFill>
+                  <a:srgbClr val="0F233A"/>
+                </a:solidFill>
+                <a:latin typeface="Aptos"/>
+              </a:rPr>
+              <a:t>     </a:t>
+            </a:r>
+            <a:r>
+              <a:rPr sz="1400" b="1" dirty="0">
+                <a:solidFill>
+                  <a:srgbClr val="0F233A"/>
+                </a:solidFill>
+                <a:latin typeface="Aptos"/>
+              </a:rPr>
+              <a:t>SARNENDU DAS</a:t>
+            </a:r>
+            <a:endParaRPr lang="en-US" sz="1400" b="1" dirty="0">
+              <a:solidFill>
+                <a:srgbClr val="0F233A"/>
+              </a:solidFill>
+              <a:latin typeface="Aptos"/>
+            </a:endParaRPr>
+          </a:p>
+          <a:p>
+            <a:pPr algn="l"/>
+            <a:endParaRPr lang="en-US" sz="1400" b="1" dirty="0">
+              <a:solidFill>
+                <a:srgbClr val="0F233A"/>
+              </a:solidFill>
+              <a:latin typeface="Aptos"/>
+            </a:endParaRPr>
+          </a:p>
+          <a:p>
+            <a:pPr algn="l"/>
+            <a:endParaRPr lang="en-US" sz="1400" b="1" dirty="0">
+              <a:solidFill>
+                <a:srgbClr val="0F233A"/>
+              </a:solidFill>
+              <a:latin typeface="Aptos"/>
+            </a:endParaRPr>
+          </a:p>
+          <a:p>
+            <a:endParaRPr sz="1400" b="1" dirty="0">
+              <a:solidFill>
+                <a:srgbClr val="0F233A"/>
+              </a:solidFill>
+              <a:latin typeface="Aptos"/>
+            </a:endParaRPr>
+          </a:p>
+        </p:txBody>
+      </p:sp>
+      <p:sp>
+        <p:nvSpPr>
+          <p:cNvPr id="34" name="TextBox 33"/>
+          <p:cNvSpPr txBox="1"/>
+          <p:nvPr/>
+        </p:nvSpPr>
+        <p:spPr>
+          <a:xfrm>
+            <a:off x="473202" y="3312414"/>
+            <a:ext cx="2537460" cy="183127"/>
+          </a:xfrm>
+          <a:prstGeom prst="rect">
+            <a:avLst/>
+          </a:prstGeom>
+          <a:noFill/>
+        </p:spPr>
+        <p:txBody>
+          <a:bodyPr wrap="square" lIns="27432" tIns="6858" rIns="27432" bIns="6858">
+            <a:spAutoFit/>
+          </a:bodyPr>
+          <a:lstStyle/>
+          <a:p>
+            <a:r>
+              <a:rPr lang="en-US" sz="1100" b="1" i="1" dirty="0">
+                <a:solidFill>
+                  <a:schemeClr val="bg2">
+                    <a:lumMod val="90000"/>
+                  </a:schemeClr>
+                </a:solidFill>
+                <a:latin typeface="Aptos"/>
+              </a:rPr>
+              <a:t>                        </a:t>
+            </a:r>
+            <a:r>
+              <a:rPr lang="en-IN" sz="1100" b="1" i="1" dirty="0"/>
+              <a:t>24a12res592</a:t>
+            </a:r>
+            <a:endParaRPr sz="1100" b="1" i="1" dirty="0">
+              <a:solidFill>
+                <a:schemeClr val="bg2">
+                  <a:lumMod val="90000"/>
+                </a:schemeClr>
+              </a:solidFill>
+              <a:latin typeface="Aptos"/>
+            </a:endParaRPr>
+          </a:p>
+        </p:txBody>
+      </p:sp>
+      <p:sp>
+        <p:nvSpPr>
+          <p:cNvPr id="35" name="TextBox 34"/>
+          <p:cNvSpPr txBox="1"/>
+          <p:nvPr/>
+        </p:nvSpPr>
+        <p:spPr>
+          <a:xfrm>
+            <a:off x="473202" y="3552444"/>
+            <a:ext cx="2558034" cy="1115690"/>
+          </a:xfrm>
+          <a:prstGeom prst="rect">
+            <a:avLst/>
+          </a:prstGeom>
+          <a:noFill/>
+        </p:spPr>
+        <p:txBody>
+          <a:bodyPr wrap="square">
+            <a:spAutoFit/>
+          </a:bodyPr>
+          <a:lstStyle/>
+          <a:p>
+            <a:pPr>
+              <a:spcAft>
+                <a:spcPts val="525"/>
+              </a:spcAft>
+              <a:defRPr sz="900">
+                <a:solidFill>
+                  <a:srgbClr val="202D3A"/>
+                </a:solidFill>
+                <a:latin typeface="Aptos"/>
+              </a:defRPr>
+            </a:pPr>
+            <a:r>
+              <a:rPr lang="en-IN" sz="900" b="1" dirty="0">
+                <a:solidFill>
+                  <a:schemeClr val="accent1">
+                    <a:lumMod val="75000"/>
+                  </a:schemeClr>
+                </a:solidFill>
+                <a:latin typeface="Aptos"/>
+              </a:rPr>
+              <a:t>Backend &amp; Monitoring API</a:t>
+            </a:r>
+            <a:endParaRPr lang="en-US" sz="900" b="1" dirty="0">
+              <a:solidFill>
+                <a:schemeClr val="accent1">
+                  <a:lumMod val="75000"/>
+                </a:schemeClr>
+              </a:solidFill>
+            </a:endParaRPr>
+          </a:p>
+          <a:p>
+            <a:pPr>
+              <a:spcAft>
+                <a:spcPts val="525"/>
+              </a:spcAft>
+              <a:defRPr sz="900">
+                <a:solidFill>
+                  <a:srgbClr val="202D3A"/>
+                </a:solidFill>
+                <a:latin typeface="Aptos"/>
+              </a:defRPr>
+            </a:pPr>
+            <a:r>
+              <a:rPr sz="900" dirty="0"/>
+              <a:t>• Custom backend service + REST/metrics endpoints</a:t>
+            </a:r>
+          </a:p>
+          <a:p>
+            <a:pPr>
+              <a:spcAft>
+                <a:spcPts val="525"/>
+              </a:spcAft>
+              <a:defRPr sz="900">
+                <a:solidFill>
+                  <a:srgbClr val="202D3A"/>
+                </a:solidFill>
+                <a:latin typeface="Aptos"/>
+              </a:defRPr>
+            </a:pPr>
+            <a:r>
+              <a:rPr sz="900" dirty="0"/>
+              <a:t>• Metric ingestion, processing and health checks</a:t>
+            </a:r>
+          </a:p>
+          <a:p>
+            <a:pPr>
+              <a:spcAft>
+                <a:spcPts val="525"/>
+              </a:spcAft>
+              <a:defRPr sz="900">
+                <a:solidFill>
+                  <a:srgbClr val="202D3A"/>
+                </a:solidFill>
+                <a:latin typeface="Aptos"/>
+              </a:defRPr>
+            </a:pPr>
+            <a:r>
+              <a:rPr sz="900" dirty="0"/>
+              <a:t>• Database / persistence and API integration</a:t>
+            </a:r>
+          </a:p>
+        </p:txBody>
+      </p:sp>
+      <p:sp>
+        <p:nvSpPr>
+          <p:cNvPr id="36" name="Rounded Rectangle 35"/>
+          <p:cNvSpPr/>
+          <p:nvPr/>
+        </p:nvSpPr>
+        <p:spPr>
+          <a:xfrm>
+            <a:off x="3202686" y="3003804"/>
+            <a:ext cx="2729484" cy="1831086"/>
+          </a:xfrm>
+          <a:prstGeom prst="roundRect">
+            <a:avLst/>
+          </a:prstGeom>
+          <a:solidFill>
+            <a:srgbClr val="FFFFFF"/>
+          </a:solidFill>
+          <a:ln>
+            <a:solidFill>
+              <a:srgbClr val="D0E0E8"/>
+            </a:solidFill>
+          </a:ln>
+        </p:spPr>
+        <p:style>
+          <a:lnRef idx="1">
+            <a:schemeClr val="accent1"/>
+          </a:lnRef>
+          <a:fillRef idx="3">
+            <a:schemeClr val="accent1"/>
+          </a:fillRef>
+          <a:effectRef idx="2">
+            <a:schemeClr val="accent1"/>
+          </a:effectRef>
+          <a:fontRef idx="minor">
+            <a:schemeClr val="lt1"/>
+          </a:fontRef>
+        </p:style>
+        <p:txBody>
+          <a:bodyPr rtlCol="0" anchor="ctr"/>
+          <a:lstStyle/>
+          <a:p>
+            <a:pPr algn="ctr"/>
+            <a:endParaRPr sz="1350"/>
+          </a:p>
+        </p:txBody>
+      </p:sp>
+      <p:sp>
+        <p:nvSpPr>
+          <p:cNvPr id="37" name="Rounded Rectangle 36"/>
+          <p:cNvSpPr/>
+          <p:nvPr/>
+        </p:nvSpPr>
+        <p:spPr>
+          <a:xfrm>
+            <a:off x="3202686" y="3003803"/>
+            <a:ext cx="2729484" cy="548641"/>
+          </a:xfrm>
+          <a:prstGeom prst="roundRect">
+            <a:avLst/>
+          </a:prstGeom>
+          <a:solidFill>
+            <a:srgbClr val="00A0B4"/>
+          </a:solidFill>
+          <a:ln>
+            <a:noFill/>
+          </a:ln>
+        </p:spPr>
+        <p:style>
+          <a:lnRef idx="1">
+            <a:schemeClr val="accent1"/>
+          </a:lnRef>
+          <a:fillRef idx="3">
+            <a:schemeClr val="accent1"/>
+          </a:fillRef>
+          <a:effectRef idx="2">
+            <a:schemeClr val="accent1"/>
+          </a:effectRef>
+          <a:fontRef idx="minor">
+            <a:schemeClr val="lt1"/>
+          </a:fontRef>
+        </p:style>
+        <p:txBody>
+          <a:bodyPr rtlCol="0" anchor="ctr"/>
+          <a:lstStyle/>
+          <a:p>
+            <a:pPr algn="ctr"/>
+            <a:endParaRPr sz="1350"/>
+          </a:p>
+        </p:txBody>
+      </p:sp>
+      <p:sp>
+        <p:nvSpPr>
+          <p:cNvPr id="39" name="TextBox 38"/>
+          <p:cNvSpPr txBox="1"/>
+          <p:nvPr/>
+        </p:nvSpPr>
+        <p:spPr>
+          <a:xfrm>
+            <a:off x="3600450" y="3092958"/>
+            <a:ext cx="2235708" cy="198516"/>
+          </a:xfrm>
+          <a:prstGeom prst="rect">
+            <a:avLst/>
+          </a:prstGeom>
+          <a:noFill/>
+        </p:spPr>
+        <p:txBody>
+          <a:bodyPr wrap="square" lIns="27432" tIns="6858" rIns="27432" bIns="6858">
+            <a:spAutoFit/>
+          </a:bodyPr>
+          <a:lstStyle/>
+          <a:p>
+            <a:pPr algn="l"/>
+            <a:r>
+              <a:rPr lang="en-US" sz="1200" b="1" dirty="0">
+                <a:solidFill>
+                  <a:srgbClr val="0F233A"/>
+                </a:solidFill>
+                <a:latin typeface="Aptos"/>
+              </a:rPr>
+              <a:t>    </a:t>
+            </a:r>
+            <a:r>
+              <a:rPr sz="1200" b="1" dirty="0">
+                <a:solidFill>
+                  <a:srgbClr val="0F233A"/>
+                </a:solidFill>
+                <a:latin typeface="Aptos"/>
+              </a:rPr>
+              <a:t>PARVEEN KUMAR</a:t>
+            </a:r>
+          </a:p>
+        </p:txBody>
+      </p:sp>
+      <p:sp>
+        <p:nvSpPr>
+          <p:cNvPr id="40" name="TextBox 39"/>
+          <p:cNvSpPr txBox="1"/>
+          <p:nvPr/>
+        </p:nvSpPr>
+        <p:spPr>
+          <a:xfrm>
+            <a:off x="3298698" y="3312414"/>
+            <a:ext cx="2537460" cy="183127"/>
+          </a:xfrm>
+          <a:prstGeom prst="rect">
+            <a:avLst/>
+          </a:prstGeom>
+          <a:noFill/>
+        </p:spPr>
+        <p:txBody>
+          <a:bodyPr wrap="square" lIns="27432" tIns="6858" rIns="27432" bIns="6858">
+            <a:spAutoFit/>
+          </a:bodyPr>
+          <a:lstStyle/>
+          <a:p>
+            <a:r>
+              <a:rPr lang="en-IN" sz="1100" b="1" i="1" dirty="0"/>
+              <a:t>                24a12res426</a:t>
+            </a:r>
+            <a:endParaRPr sz="1100" b="1" i="1" dirty="0">
+              <a:solidFill>
+                <a:schemeClr val="bg2">
+                  <a:lumMod val="90000"/>
+                </a:schemeClr>
+              </a:solidFill>
+              <a:latin typeface="Aptos"/>
+            </a:endParaRPr>
+          </a:p>
+        </p:txBody>
+      </p:sp>
+      <p:sp>
+        <p:nvSpPr>
+          <p:cNvPr id="41" name="TextBox 40"/>
+          <p:cNvSpPr txBox="1"/>
+          <p:nvPr/>
+        </p:nvSpPr>
+        <p:spPr>
+          <a:xfrm>
+            <a:off x="3298698" y="3552444"/>
+            <a:ext cx="2558034" cy="977191"/>
+          </a:xfrm>
+          <a:prstGeom prst="rect">
+            <a:avLst/>
+          </a:prstGeom>
+          <a:noFill/>
+        </p:spPr>
+        <p:txBody>
+          <a:bodyPr wrap="square">
+            <a:spAutoFit/>
+          </a:bodyPr>
+          <a:lstStyle/>
+          <a:p>
+            <a:pPr>
+              <a:spcAft>
+                <a:spcPts val="525"/>
+              </a:spcAft>
+              <a:defRPr sz="900">
+                <a:solidFill>
+                  <a:srgbClr val="202D3A"/>
+                </a:solidFill>
+                <a:latin typeface="Aptos"/>
+              </a:defRPr>
+            </a:pPr>
+            <a:r>
+              <a:rPr lang="en-US" sz="900" b="1" dirty="0">
+                <a:solidFill>
+                  <a:schemeClr val="bg2">
+                    <a:lumMod val="90000"/>
+                  </a:schemeClr>
+                </a:solidFill>
+                <a:latin typeface="Aptos"/>
+              </a:rPr>
+              <a:t> </a:t>
+            </a:r>
+            <a:r>
+              <a:rPr lang="en-US" sz="900" b="1" dirty="0">
+                <a:solidFill>
+                  <a:schemeClr val="accent1">
+                    <a:lumMod val="75000"/>
+                  </a:schemeClr>
+                </a:solidFill>
+                <a:latin typeface="Aptos"/>
+              </a:rPr>
+              <a:t>Frontend &amp; Dashboard</a:t>
+            </a:r>
+            <a:endParaRPr lang="en-US" sz="900" dirty="0"/>
+          </a:p>
+          <a:p>
+            <a:pPr>
+              <a:spcAft>
+                <a:spcPts val="525"/>
+              </a:spcAft>
+              <a:defRPr sz="900">
+                <a:solidFill>
+                  <a:srgbClr val="202D3A"/>
+                </a:solidFill>
+                <a:latin typeface="Aptos"/>
+              </a:defRPr>
+            </a:pPr>
+            <a:r>
+              <a:rPr sz="900" dirty="0"/>
+              <a:t>• React + TypeScript dashboard interface</a:t>
+            </a:r>
+          </a:p>
+          <a:p>
+            <a:pPr>
+              <a:spcAft>
+                <a:spcPts val="525"/>
+              </a:spcAft>
+              <a:defRPr sz="900">
+                <a:solidFill>
+                  <a:srgbClr val="202D3A"/>
+                </a:solidFill>
+                <a:latin typeface="Aptos"/>
+              </a:defRPr>
+            </a:pPr>
+            <a:r>
+              <a:rPr sz="900" dirty="0"/>
+              <a:t>• Host/container status and metric visualizations</a:t>
+            </a:r>
+          </a:p>
+          <a:p>
+            <a:pPr>
+              <a:spcAft>
+                <a:spcPts val="525"/>
+              </a:spcAft>
+              <a:defRPr sz="900">
+                <a:solidFill>
+                  <a:srgbClr val="202D3A"/>
+                </a:solidFill>
+                <a:latin typeface="Aptos"/>
+              </a:defRPr>
+            </a:pPr>
+            <a:r>
+              <a:rPr sz="900" dirty="0"/>
+              <a:t>• Frontend ↔ backend integration and UX</a:t>
+            </a:r>
+          </a:p>
+        </p:txBody>
+      </p:sp>
+      <p:sp>
+        <p:nvSpPr>
+          <p:cNvPr id="42" name="Rounded Rectangle 41"/>
+          <p:cNvSpPr/>
+          <p:nvPr/>
+        </p:nvSpPr>
+        <p:spPr>
+          <a:xfrm>
+            <a:off x="6028182" y="3003803"/>
+            <a:ext cx="2729484" cy="1831087"/>
+          </a:xfrm>
+          <a:prstGeom prst="roundRect">
+            <a:avLst/>
+          </a:prstGeom>
+          <a:solidFill>
+            <a:srgbClr val="FFFFFF"/>
+          </a:solidFill>
+          <a:ln>
+            <a:solidFill>
+              <a:srgbClr val="D0E0E8"/>
+            </a:solidFill>
+          </a:ln>
+        </p:spPr>
+        <p:style>
+          <a:lnRef idx="1">
+            <a:schemeClr val="accent1"/>
+          </a:lnRef>
+          <a:fillRef idx="3">
+            <a:schemeClr val="accent1"/>
+          </a:fillRef>
+          <a:effectRef idx="2">
+            <a:schemeClr val="accent1"/>
+          </a:effectRef>
+          <a:fontRef idx="minor">
+            <a:schemeClr val="lt1"/>
+          </a:fontRef>
+        </p:style>
+        <p:txBody>
+          <a:bodyPr rtlCol="0" anchor="ctr"/>
+          <a:lstStyle/>
+          <a:p>
+            <a:pPr algn="ctr"/>
+            <a:endParaRPr sz="1350"/>
+          </a:p>
+        </p:txBody>
+      </p:sp>
+      <p:sp>
+        <p:nvSpPr>
+          <p:cNvPr id="43" name="Rounded Rectangle 42"/>
+          <p:cNvSpPr/>
+          <p:nvPr/>
+        </p:nvSpPr>
+        <p:spPr>
+          <a:xfrm>
+            <a:off x="6028182" y="3003804"/>
+            <a:ext cx="2729484" cy="491737"/>
+          </a:xfrm>
+          <a:prstGeom prst="roundRect">
+            <a:avLst/>
+          </a:prstGeom>
+          <a:solidFill>
+            <a:srgbClr val="00A0B4"/>
+          </a:solidFill>
+          <a:ln>
+            <a:noFill/>
+          </a:ln>
+        </p:spPr>
+        <p:style>
+          <a:lnRef idx="1">
+            <a:schemeClr val="accent1"/>
+          </a:lnRef>
+          <a:fillRef idx="3">
+            <a:schemeClr val="accent1"/>
+          </a:fillRef>
+          <a:effectRef idx="2">
+            <a:schemeClr val="accent1"/>
+          </a:effectRef>
+          <a:fontRef idx="minor">
+            <a:schemeClr val="lt1"/>
+          </a:fontRef>
+        </p:style>
+        <p:txBody>
+          <a:bodyPr rtlCol="0" anchor="ctr"/>
+          <a:lstStyle/>
+          <a:p>
+            <a:pPr algn="ctr"/>
+            <a:endParaRPr sz="1350"/>
+          </a:p>
+        </p:txBody>
+      </p:sp>
+      <p:sp>
+        <p:nvSpPr>
+          <p:cNvPr id="45" name="TextBox 44"/>
+          <p:cNvSpPr txBox="1"/>
+          <p:nvPr/>
+        </p:nvSpPr>
+        <p:spPr>
+          <a:xfrm>
+            <a:off x="6425946" y="3092958"/>
+            <a:ext cx="2235708" cy="229294"/>
+          </a:xfrm>
+          <a:prstGeom prst="rect">
+            <a:avLst/>
+          </a:prstGeom>
+          <a:noFill/>
+        </p:spPr>
+        <p:txBody>
+          <a:bodyPr wrap="square" lIns="27432" tIns="6858" rIns="27432" bIns="6858">
+            <a:spAutoFit/>
+          </a:bodyPr>
+          <a:lstStyle/>
+          <a:p>
+            <a:pPr algn="l"/>
+            <a:r>
+              <a:rPr lang="en-US" sz="1400" b="1" dirty="0">
+                <a:solidFill>
+                  <a:srgbClr val="0F233A"/>
+                </a:solidFill>
+                <a:latin typeface="Aptos"/>
+              </a:rPr>
+              <a:t>              </a:t>
+            </a:r>
+            <a:r>
+              <a:rPr sz="1400" b="1" dirty="0">
+                <a:solidFill>
+                  <a:srgbClr val="0F233A"/>
+                </a:solidFill>
+                <a:latin typeface="Aptos"/>
+              </a:rPr>
+              <a:t>AYUSH RAJ</a:t>
+            </a:r>
+          </a:p>
+        </p:txBody>
+      </p:sp>
+      <p:sp>
+        <p:nvSpPr>
+          <p:cNvPr id="46" name="TextBox 45"/>
+          <p:cNvSpPr txBox="1"/>
+          <p:nvPr/>
+        </p:nvSpPr>
+        <p:spPr>
+          <a:xfrm>
+            <a:off x="6124194" y="3312414"/>
+            <a:ext cx="2537460" cy="183127"/>
+          </a:xfrm>
+          <a:prstGeom prst="rect">
+            <a:avLst/>
+          </a:prstGeom>
+          <a:noFill/>
+        </p:spPr>
+        <p:txBody>
+          <a:bodyPr wrap="square" lIns="27432" tIns="6858" rIns="27432" bIns="6858">
+            <a:spAutoFit/>
+          </a:bodyPr>
+          <a:lstStyle/>
+          <a:p>
+            <a:r>
+              <a:rPr lang="en-US" sz="1100" b="1" dirty="0">
+                <a:solidFill>
+                  <a:schemeClr val="accent1">
+                    <a:lumMod val="20000"/>
+                    <a:lumOff val="80000"/>
+                  </a:schemeClr>
+                </a:solidFill>
+                <a:latin typeface="Aptos"/>
+              </a:rPr>
+              <a:t>                             </a:t>
+            </a:r>
+            <a:r>
+              <a:rPr lang="en-IN" sz="1100" b="1" i="1" dirty="0"/>
+              <a:t>24a12res897</a:t>
+            </a:r>
+            <a:r>
+              <a:rPr lang="en-US" sz="1100" b="1" dirty="0">
+                <a:solidFill>
+                  <a:schemeClr val="accent1">
+                    <a:lumMod val="20000"/>
+                    <a:lumOff val="80000"/>
+                  </a:schemeClr>
+                </a:solidFill>
+                <a:latin typeface="Aptos"/>
+              </a:rPr>
+              <a:t> </a:t>
+            </a:r>
+            <a:endParaRPr sz="1100" b="1" i="1" dirty="0">
+              <a:solidFill>
+                <a:schemeClr val="accent1">
+                  <a:lumMod val="20000"/>
+                  <a:lumOff val="80000"/>
+                </a:schemeClr>
+              </a:solidFill>
+              <a:latin typeface="Aptos"/>
+            </a:endParaRPr>
+          </a:p>
+        </p:txBody>
+      </p:sp>
+      <p:sp>
+        <p:nvSpPr>
+          <p:cNvPr id="47" name="TextBox 46"/>
+          <p:cNvSpPr txBox="1"/>
+          <p:nvPr/>
+        </p:nvSpPr>
+        <p:spPr>
+          <a:xfrm>
+            <a:off x="6124194" y="3552444"/>
+            <a:ext cx="2558034" cy="1382430"/>
+          </a:xfrm>
+          <a:prstGeom prst="rect">
+            <a:avLst/>
+          </a:prstGeom>
+          <a:noFill/>
+        </p:spPr>
+        <p:txBody>
+          <a:bodyPr wrap="square">
+            <a:spAutoFit/>
+          </a:bodyPr>
+          <a:lstStyle/>
+          <a:p>
+            <a:pPr>
+              <a:spcAft>
+                <a:spcPts val="525"/>
+              </a:spcAft>
+              <a:defRPr sz="900">
+                <a:solidFill>
+                  <a:srgbClr val="202D3A"/>
+                </a:solidFill>
+                <a:latin typeface="Aptos"/>
+              </a:defRPr>
+            </a:pPr>
+            <a:r>
+              <a:rPr lang="en-US" sz="900" b="1" dirty="0">
+                <a:solidFill>
+                  <a:schemeClr val="accent1">
+                    <a:lumMod val="20000"/>
+                    <a:lumOff val="80000"/>
+                  </a:schemeClr>
+                </a:solidFill>
+                <a:latin typeface="Aptos"/>
+              </a:rPr>
+              <a:t> </a:t>
+            </a:r>
+            <a:r>
+              <a:rPr lang="en-US" sz="900" b="1" dirty="0">
+                <a:solidFill>
+                  <a:schemeClr val="accent1">
+                    <a:lumMod val="75000"/>
+                  </a:schemeClr>
+                </a:solidFill>
+                <a:latin typeface="Aptos"/>
+              </a:rPr>
+              <a:t>AWS Cloud &amp; DevOps</a:t>
+            </a:r>
+            <a:endParaRPr lang="en-US" sz="900" dirty="0"/>
+          </a:p>
+          <a:p>
+            <a:pPr>
+              <a:spcAft>
+                <a:spcPts val="525"/>
+              </a:spcAft>
+              <a:defRPr sz="900">
+                <a:solidFill>
+                  <a:srgbClr val="202D3A"/>
+                </a:solidFill>
+                <a:latin typeface="Aptos"/>
+              </a:defRPr>
+            </a:pPr>
+            <a:r>
+              <a:rPr sz="900" dirty="0"/>
+              <a:t>• AWS EC2 Ubuntu, IAM and Security Groups</a:t>
+            </a:r>
+          </a:p>
+          <a:p>
+            <a:pPr>
+              <a:spcAft>
+                <a:spcPts val="525"/>
+              </a:spcAft>
+              <a:defRPr sz="900">
+                <a:solidFill>
+                  <a:srgbClr val="202D3A"/>
+                </a:solidFill>
+                <a:latin typeface="Aptos"/>
+              </a:defRPr>
+            </a:pPr>
+            <a:r>
+              <a:rPr sz="900" dirty="0"/>
+              <a:t>• Docker / Compose; Node Exporter + </a:t>
+            </a:r>
+            <a:r>
+              <a:rPr sz="900" dirty="0" err="1"/>
+              <a:t>cAdvisor</a:t>
+            </a:r>
+            <a:endParaRPr sz="900" dirty="0"/>
+          </a:p>
+          <a:p>
+            <a:pPr>
+              <a:spcAft>
+                <a:spcPts val="525"/>
+              </a:spcAft>
+              <a:defRPr sz="900">
+                <a:solidFill>
+                  <a:srgbClr val="202D3A"/>
+                </a:solidFill>
+                <a:latin typeface="Aptos"/>
+              </a:defRPr>
+            </a:pPr>
+            <a:r>
+              <a:rPr sz="900" dirty="0"/>
+              <a:t>• Prometheus, Grafana, alerting and deployment verification</a:t>
+            </a:r>
+            <a:endParaRPr lang="en-US" sz="900" dirty="0"/>
+          </a:p>
+          <a:p>
+            <a:pPr>
+              <a:spcAft>
+                <a:spcPts val="525"/>
+              </a:spcAft>
+              <a:defRPr sz="900">
+                <a:solidFill>
+                  <a:srgbClr val="202D3A"/>
+                </a:solidFill>
+                <a:latin typeface="Aptos"/>
+              </a:defRPr>
+            </a:pPr>
+            <a:endParaRPr lang="en-US" sz="900" dirty="0"/>
+          </a:p>
+          <a:p>
+            <a:pPr>
+              <a:spcAft>
+                <a:spcPts val="525"/>
+              </a:spcAft>
+              <a:defRPr sz="900">
+                <a:solidFill>
+                  <a:srgbClr val="202D3A"/>
+                </a:solidFill>
+                <a:latin typeface="Aptos"/>
+              </a:defRPr>
+            </a:pPr>
+            <a:endParaRPr sz="900" dirty="0"/>
+          </a:p>
+        </p:txBody>
+      </p:sp>
+      <p:sp>
+        <p:nvSpPr>
+          <p:cNvPr id="49" name="TextBox 48"/>
+          <p:cNvSpPr txBox="1"/>
+          <p:nvPr/>
+        </p:nvSpPr>
+        <p:spPr>
+          <a:xfrm>
+            <a:off x="8229600" y="4834890"/>
+            <a:ext cx="342900" cy="167738"/>
+          </a:xfrm>
+          <a:prstGeom prst="rect">
+            <a:avLst/>
+          </a:prstGeom>
+          <a:noFill/>
+        </p:spPr>
+        <p:txBody>
+          <a:bodyPr wrap="square" lIns="27432" tIns="6858" rIns="27432" bIns="6858">
+            <a:spAutoFit/>
+          </a:bodyPr>
+          <a:lstStyle/>
+          <a:p>
+            <a:pPr algn="r"/>
+            <a:r>
+              <a:rPr lang="en-IN" sz="1000" b="1" dirty="0">
+                <a:solidFill>
+                  <a:srgbClr val="7030A0"/>
+                </a:solidFill>
+                <a:latin typeface="Aptos"/>
+              </a:rPr>
+              <a:t>2</a:t>
+            </a:r>
+            <a:endParaRPr sz="1000" b="1" dirty="0">
+              <a:solidFill>
+                <a:srgbClr val="7030A0"/>
+              </a:solidFill>
+              <a:latin typeface="Aptos"/>
+            </a:endParaRPr>
+          </a:p>
+        </p:txBody>
+      </p:sp>
+      <p:sp>
+        <p:nvSpPr>
+          <p:cNvPr id="52" name="Text 0">
+            <a:extLst>
+              <a:ext uri="{FF2B5EF4-FFF2-40B4-BE49-F238E27FC236}">
+                <a16:creationId xmlns:a16="http://schemas.microsoft.com/office/drawing/2014/main" id="{60FE0EF2-D95B-A598-82C3-5A433B9F9479}"/>
+              </a:ext>
+            </a:extLst>
+          </p:cNvPr>
+          <p:cNvSpPr/>
+          <p:nvPr/>
+        </p:nvSpPr>
+        <p:spPr>
+          <a:xfrm>
+            <a:off x="170180" y="80920"/>
+            <a:ext cx="7634224" cy="639170"/>
           </a:xfrm>
           <a:prstGeom prst="rect">
             <a:avLst/>
@@ -13645,636 +15475,6 @@
               </a:rPr>
               <a:t>                    Project Overview</a:t>
             </a:r>
-          </a:p>
-        </p:txBody>
-      </p:sp>
-      <p:sp>
-        <p:nvSpPr>
-          <p:cNvPr id="3" name="Shape 1"/>
-          <p:cNvSpPr/>
-          <p:nvPr/>
-        </p:nvSpPr>
-        <p:spPr>
-          <a:xfrm>
-            <a:off x="457200" y="1097280"/>
-            <a:ext cx="8229600" cy="566928"/>
-          </a:xfrm>
-          <a:prstGeom prst="roundRect">
-            <a:avLst>
-              <a:gd name="adj" fmla="val 12903"/>
-            </a:avLst>
-          </a:prstGeom>
-          <a:solidFill>
-            <a:schemeClr val="bg2"/>
-          </a:solidFill>
-          <a:ln/>
-        </p:spPr>
-      </p:sp>
-      <p:sp>
-        <p:nvSpPr>
-          <p:cNvPr id="4" name="Text 2"/>
-          <p:cNvSpPr txBox="1"/>
-          <p:nvPr/>
-        </p:nvSpPr>
-        <p:spPr>
-          <a:xfrm>
-            <a:off x="640080" y="1097280"/>
-            <a:ext cx="1828800" cy="566928"/>
-          </a:xfrm>
-          <a:prstGeom prst="rect">
-            <a:avLst/>
-          </a:prstGeom>
-          <a:noFill/>
-          <a:ln/>
-        </p:spPr>
-        <p:txBody>
-          <a:bodyPr wrap="square" lIns="0" tIns="0" rIns="0" bIns="0" rtlCol="0" anchor="ctr"/>
-          <a:lstStyle/>
-          <a:p>
-            <a:pPr marL="0" indent="0">
-              <a:buNone/>
-            </a:pPr>
-            <a:r>
-              <a:rPr lang="en-US" sz="1400" b="1" dirty="0">
-                <a:solidFill>
-                  <a:schemeClr val="accent1"/>
-                </a:solidFill>
-              </a:rPr>
-              <a:t>Industry / Domain</a:t>
-            </a:r>
-            <a:endParaRPr lang="en-US" sz="1400" dirty="0"/>
-          </a:p>
-        </p:txBody>
-      </p:sp>
-      <p:sp>
-        <p:nvSpPr>
-          <p:cNvPr id="5" name="Text 3"/>
-          <p:cNvSpPr txBox="1"/>
-          <p:nvPr/>
-        </p:nvSpPr>
-        <p:spPr>
-          <a:xfrm>
-            <a:off x="2468880" y="1097280"/>
-            <a:ext cx="6080760" cy="566928"/>
-          </a:xfrm>
-          <a:prstGeom prst="rect">
-            <a:avLst/>
-          </a:prstGeom>
-          <a:noFill/>
-          <a:ln/>
-        </p:spPr>
-        <p:txBody>
-          <a:bodyPr wrap="square" lIns="0" tIns="0" rIns="0" bIns="0" rtlCol="0" anchor="ctr"/>
-          <a:lstStyle/>
-          <a:p>
-            <a:pPr marL="0" indent="0">
-              <a:buNone/>
-            </a:pPr>
-            <a:r>
-              <a:rPr lang="en-US" sz="1400" dirty="0">
-                <a:solidFill>
-                  <a:schemeClr val="tx1"/>
-                </a:solidFill>
-              </a:rPr>
-              <a:t>IT operations and DevOps (small SaaS and dev teams)</a:t>
-            </a:r>
-            <a:endParaRPr lang="en-US" sz="1400" dirty="0"/>
-          </a:p>
-        </p:txBody>
-      </p:sp>
-      <p:sp>
-        <p:nvSpPr>
-          <p:cNvPr id="6" name="Shape 4"/>
-          <p:cNvSpPr/>
-          <p:nvPr/>
-        </p:nvSpPr>
-        <p:spPr>
-          <a:xfrm>
-            <a:off x="457200" y="1737360"/>
-            <a:ext cx="8229600" cy="566928"/>
-          </a:xfrm>
-          <a:prstGeom prst="roundRect">
-            <a:avLst>
-              <a:gd name="adj" fmla="val 12903"/>
-            </a:avLst>
-          </a:prstGeom>
-          <a:solidFill>
-            <a:schemeClr val="bg2"/>
-          </a:solidFill>
-          <a:ln/>
-        </p:spPr>
-      </p:sp>
-      <p:sp>
-        <p:nvSpPr>
-          <p:cNvPr id="7" name="Text 5"/>
-          <p:cNvSpPr txBox="1"/>
-          <p:nvPr/>
-        </p:nvSpPr>
-        <p:spPr>
-          <a:xfrm>
-            <a:off x="640080" y="1737360"/>
-            <a:ext cx="1828800" cy="566928"/>
-          </a:xfrm>
-          <a:prstGeom prst="rect">
-            <a:avLst/>
-          </a:prstGeom>
-          <a:noFill/>
-          <a:ln/>
-        </p:spPr>
-        <p:txBody>
-          <a:bodyPr wrap="square" lIns="0" tIns="0" rIns="0" bIns="0" rtlCol="0" anchor="ctr"/>
-          <a:lstStyle/>
-          <a:p>
-            <a:pPr marL="0" indent="0">
-              <a:buNone/>
-            </a:pPr>
-            <a:r>
-              <a:rPr lang="en-US" sz="1400" b="1" dirty="0">
-                <a:solidFill>
-                  <a:schemeClr val="accent1"/>
-                </a:solidFill>
-              </a:rPr>
-              <a:t>Use Case</a:t>
-            </a:r>
-            <a:endParaRPr lang="en-US" sz="1400" dirty="0"/>
-          </a:p>
-        </p:txBody>
-      </p:sp>
-      <p:sp>
-        <p:nvSpPr>
-          <p:cNvPr id="8" name="Text 6"/>
-          <p:cNvSpPr txBox="1"/>
-          <p:nvPr/>
-        </p:nvSpPr>
-        <p:spPr>
-          <a:xfrm>
-            <a:off x="2468880" y="1737360"/>
-            <a:ext cx="6080760" cy="566928"/>
-          </a:xfrm>
-          <a:prstGeom prst="rect">
-            <a:avLst/>
-          </a:prstGeom>
-          <a:noFill/>
-          <a:ln/>
-        </p:spPr>
-        <p:txBody>
-          <a:bodyPr wrap="square" lIns="0" tIns="0" rIns="0" bIns="0" rtlCol="0" anchor="ctr"/>
-          <a:lstStyle/>
-          <a:p>
-            <a:pPr marL="0" indent="0">
-              <a:buNone/>
-            </a:pPr>
-            <a:r>
-              <a:rPr lang="en-US" sz="1400" dirty="0">
-                <a:solidFill>
-                  <a:schemeClr val="tx1"/>
-                </a:solidFill>
-              </a:rPr>
-              <a:t>Monitor Docker hosts and containers from one web dashboard</a:t>
-            </a:r>
-            <a:endParaRPr lang="en-US" sz="1400" dirty="0"/>
-          </a:p>
-        </p:txBody>
-      </p:sp>
-      <p:sp>
-        <p:nvSpPr>
-          <p:cNvPr id="9" name="Shape 7"/>
-          <p:cNvSpPr/>
-          <p:nvPr/>
-        </p:nvSpPr>
-        <p:spPr>
-          <a:xfrm>
-            <a:off x="457200" y="2377440"/>
-            <a:ext cx="8229600" cy="566928"/>
-          </a:xfrm>
-          <a:prstGeom prst="roundRect">
-            <a:avLst>
-              <a:gd name="adj" fmla="val 12903"/>
-            </a:avLst>
-          </a:prstGeom>
-          <a:solidFill>
-            <a:schemeClr val="bg2"/>
-          </a:solidFill>
-          <a:ln/>
-        </p:spPr>
-      </p:sp>
-      <p:sp>
-        <p:nvSpPr>
-          <p:cNvPr id="10" name="Text 8"/>
-          <p:cNvSpPr txBox="1"/>
-          <p:nvPr/>
-        </p:nvSpPr>
-        <p:spPr>
-          <a:xfrm>
-            <a:off x="640080" y="2377440"/>
-            <a:ext cx="1828800" cy="566928"/>
-          </a:xfrm>
-          <a:prstGeom prst="rect">
-            <a:avLst/>
-          </a:prstGeom>
-          <a:noFill/>
-          <a:ln/>
-        </p:spPr>
-        <p:txBody>
-          <a:bodyPr wrap="square" lIns="0" tIns="0" rIns="0" bIns="0" rtlCol="0" anchor="ctr"/>
-          <a:lstStyle/>
-          <a:p>
-            <a:pPr marL="0" indent="0">
-              <a:buNone/>
-            </a:pPr>
-            <a:r>
-              <a:rPr lang="en-US" sz="1400" b="1" dirty="0">
-                <a:solidFill>
-                  <a:schemeClr val="accent1"/>
-                </a:solidFill>
-              </a:rPr>
-              <a:t>Business Need</a:t>
-            </a:r>
-            <a:endParaRPr lang="en-US" sz="1400" dirty="0"/>
-          </a:p>
-        </p:txBody>
-      </p:sp>
-      <p:sp>
-        <p:nvSpPr>
-          <p:cNvPr id="11" name="Text 9"/>
-          <p:cNvSpPr txBox="1"/>
-          <p:nvPr/>
-        </p:nvSpPr>
-        <p:spPr>
-          <a:xfrm>
-            <a:off x="2468880" y="2377440"/>
-            <a:ext cx="6080760" cy="566928"/>
-          </a:xfrm>
-          <a:prstGeom prst="rect">
-            <a:avLst/>
-          </a:prstGeom>
-          <a:noFill/>
-          <a:ln/>
-        </p:spPr>
-        <p:txBody>
-          <a:bodyPr wrap="square" lIns="0" tIns="0" rIns="0" bIns="0" rtlCol="0" anchor="ctr"/>
-          <a:lstStyle/>
-          <a:p>
-            <a:pPr marL="0" indent="0">
-              <a:buNone/>
-            </a:pPr>
-            <a:r>
-              <a:rPr lang="en-US" sz="1400" dirty="0">
-                <a:solidFill>
-                  <a:schemeClr val="tx1"/>
-                </a:solidFill>
-              </a:rPr>
-              <a:t>Small teams cannot inspect every host by hand; they need one health view</a:t>
-            </a:r>
-            <a:endParaRPr lang="en-US" sz="1400" dirty="0"/>
-          </a:p>
-        </p:txBody>
-      </p:sp>
-      <p:sp>
-        <p:nvSpPr>
-          <p:cNvPr id="12" name="Shape 10"/>
-          <p:cNvSpPr/>
-          <p:nvPr/>
-        </p:nvSpPr>
-        <p:spPr>
-          <a:xfrm>
-            <a:off x="457200" y="3017520"/>
-            <a:ext cx="8229600" cy="566928"/>
-          </a:xfrm>
-          <a:prstGeom prst="roundRect">
-            <a:avLst>
-              <a:gd name="adj" fmla="val 12903"/>
-            </a:avLst>
-          </a:prstGeom>
-          <a:solidFill>
-            <a:schemeClr val="bg2"/>
-          </a:solidFill>
-          <a:ln/>
-        </p:spPr>
-      </p:sp>
-      <p:sp>
-        <p:nvSpPr>
-          <p:cNvPr id="13" name="Text 11"/>
-          <p:cNvSpPr txBox="1"/>
-          <p:nvPr/>
-        </p:nvSpPr>
-        <p:spPr>
-          <a:xfrm>
-            <a:off x="640080" y="3017520"/>
-            <a:ext cx="1828800" cy="566928"/>
-          </a:xfrm>
-          <a:prstGeom prst="rect">
-            <a:avLst/>
-          </a:prstGeom>
-          <a:noFill/>
-          <a:ln/>
-        </p:spPr>
-        <p:txBody>
-          <a:bodyPr wrap="square" lIns="0" tIns="0" rIns="0" bIns="0" rtlCol="0" anchor="ctr"/>
-          <a:lstStyle/>
-          <a:p>
-            <a:pPr marL="0" indent="0">
-              <a:buNone/>
-            </a:pPr>
-            <a:r>
-              <a:rPr lang="en-US" sz="1400" b="1" dirty="0">
-                <a:solidFill>
-                  <a:schemeClr val="accent1"/>
-                </a:solidFill>
-              </a:rPr>
-              <a:t>Target Users</a:t>
-            </a:r>
-            <a:endParaRPr lang="en-US" sz="1400" dirty="0"/>
-          </a:p>
-        </p:txBody>
-      </p:sp>
-      <p:sp>
-        <p:nvSpPr>
-          <p:cNvPr id="14" name="Text 12"/>
-          <p:cNvSpPr txBox="1"/>
-          <p:nvPr/>
-        </p:nvSpPr>
-        <p:spPr>
-          <a:xfrm>
-            <a:off x="2468880" y="3017520"/>
-            <a:ext cx="6080760" cy="566928"/>
-          </a:xfrm>
-          <a:prstGeom prst="rect">
-            <a:avLst/>
-          </a:prstGeom>
-          <a:noFill/>
-          <a:ln/>
-        </p:spPr>
-        <p:txBody>
-          <a:bodyPr wrap="square" lIns="0" tIns="0" rIns="0" bIns="0" rtlCol="0" anchor="ctr"/>
-          <a:lstStyle/>
-          <a:p>
-            <a:pPr marL="0" indent="0">
-              <a:buNone/>
-            </a:pPr>
-            <a:r>
-              <a:rPr lang="en-US" sz="1400" dirty="0">
-                <a:solidFill>
-                  <a:schemeClr val="tx1"/>
-                </a:solidFill>
-              </a:rPr>
-              <a:t>Developers, operators and admins running a few Docker hosts</a:t>
-            </a:r>
-            <a:endParaRPr lang="en-US" sz="1400" dirty="0"/>
-          </a:p>
-        </p:txBody>
-      </p:sp>
-      <p:sp>
-        <p:nvSpPr>
-          <p:cNvPr id="15" name="Shape 13"/>
-          <p:cNvSpPr/>
-          <p:nvPr/>
-        </p:nvSpPr>
-        <p:spPr>
-          <a:xfrm>
-            <a:off x="457200" y="3657600"/>
-            <a:ext cx="8229600" cy="566928"/>
-          </a:xfrm>
-          <a:prstGeom prst="roundRect">
-            <a:avLst>
-              <a:gd name="adj" fmla="val 12903"/>
-            </a:avLst>
-          </a:prstGeom>
-          <a:solidFill>
-            <a:schemeClr val="bg2"/>
-          </a:solidFill>
-          <a:ln/>
-        </p:spPr>
-      </p:sp>
-      <p:sp>
-        <p:nvSpPr>
-          <p:cNvPr id="16" name="Text 14"/>
-          <p:cNvSpPr txBox="1"/>
-          <p:nvPr/>
-        </p:nvSpPr>
-        <p:spPr>
-          <a:xfrm>
-            <a:off x="640080" y="3657600"/>
-            <a:ext cx="1828800" cy="566928"/>
-          </a:xfrm>
-          <a:prstGeom prst="rect">
-            <a:avLst/>
-          </a:prstGeom>
-          <a:noFill/>
-          <a:ln/>
-        </p:spPr>
-        <p:txBody>
-          <a:bodyPr wrap="square" lIns="0" tIns="0" rIns="0" bIns="0" rtlCol="0" anchor="ctr"/>
-          <a:lstStyle/>
-          <a:p>
-            <a:pPr marL="0" indent="0">
-              <a:buNone/>
-            </a:pPr>
-            <a:r>
-              <a:rPr lang="en-US" sz="1400" b="1" dirty="0">
-                <a:solidFill>
-                  <a:schemeClr val="accent1"/>
-                </a:solidFill>
-              </a:rPr>
-              <a:t>Cloud Objective</a:t>
-            </a:r>
-            <a:endParaRPr lang="en-US" sz="1400" dirty="0"/>
-          </a:p>
-        </p:txBody>
-      </p:sp>
-      <p:sp>
-        <p:nvSpPr>
-          <p:cNvPr id="17" name="Text 15"/>
-          <p:cNvSpPr txBox="1"/>
-          <p:nvPr/>
-        </p:nvSpPr>
-        <p:spPr>
-          <a:xfrm>
-            <a:off x="2468880" y="3657600"/>
-            <a:ext cx="6080760" cy="566928"/>
-          </a:xfrm>
-          <a:prstGeom prst="rect">
-            <a:avLst/>
-          </a:prstGeom>
-          <a:noFill/>
-          <a:ln/>
-        </p:spPr>
-        <p:txBody>
-          <a:bodyPr wrap="square" lIns="0" tIns="0" rIns="0" bIns="0" rtlCol="0" anchor="ctr"/>
-          <a:lstStyle/>
-          <a:p>
-            <a:pPr marL="0" indent="0">
-              <a:buNone/>
-            </a:pPr>
-            <a:r>
-              <a:rPr lang="en-US" sz="1400" dirty="0">
-                <a:solidFill>
-                  <a:schemeClr val="tx1"/>
-                </a:solidFill>
-              </a:rPr>
-              <a:t>Deploy a reliable, measurable pipeline on AWS EC2 with Docker</a:t>
-            </a:r>
-            <a:endParaRPr lang="en-US" sz="1400" dirty="0"/>
-          </a:p>
-        </p:txBody>
-      </p:sp>
-      <p:sp>
-        <p:nvSpPr>
-          <p:cNvPr id="18" name="Shape 16"/>
-          <p:cNvSpPr/>
-          <p:nvPr/>
-        </p:nvSpPr>
-        <p:spPr>
-          <a:xfrm>
-            <a:off x="457200" y="4297680"/>
-            <a:ext cx="8229600" cy="731520"/>
-          </a:xfrm>
-          <a:prstGeom prst="roundRect">
-            <a:avLst>
-              <a:gd name="adj" fmla="val 12903"/>
-            </a:avLst>
-          </a:prstGeom>
-          <a:solidFill>
-            <a:schemeClr val="bg2"/>
-          </a:solidFill>
-          <a:ln/>
-        </p:spPr>
-      </p:sp>
-      <p:sp>
-        <p:nvSpPr>
-          <p:cNvPr id="19" name="Text 17"/>
-          <p:cNvSpPr txBox="1"/>
-          <p:nvPr/>
-        </p:nvSpPr>
-        <p:spPr>
-          <a:xfrm>
-            <a:off x="640080" y="4297680"/>
-            <a:ext cx="1828800" cy="566928"/>
-          </a:xfrm>
-          <a:prstGeom prst="rect">
-            <a:avLst/>
-          </a:prstGeom>
-          <a:noFill/>
-          <a:ln/>
-        </p:spPr>
-        <p:txBody>
-          <a:bodyPr wrap="square" lIns="0" tIns="0" rIns="0" bIns="0" rtlCol="0" anchor="ctr"/>
-          <a:lstStyle/>
-          <a:p>
-            <a:pPr marL="0" indent="0">
-              <a:buNone/>
-            </a:pPr>
-            <a:r>
-              <a:rPr lang="en-US" sz="1400" b="1" dirty="0">
-                <a:solidFill>
-                  <a:schemeClr val="accent1"/>
-                </a:solidFill>
-              </a:rPr>
-              <a:t>Team Members</a:t>
-            </a:r>
-            <a:endParaRPr lang="en-US" sz="1400" dirty="0"/>
-          </a:p>
-        </p:txBody>
-      </p:sp>
-      <p:sp>
-        <p:nvSpPr>
-          <p:cNvPr id="20" name="Text 18"/>
-          <p:cNvSpPr txBox="1"/>
-          <p:nvPr/>
-        </p:nvSpPr>
-        <p:spPr>
-          <a:xfrm>
-            <a:off x="2468880" y="4297680"/>
-            <a:ext cx="6035040" cy="731520"/>
-          </a:xfrm>
-          <a:prstGeom prst="rect">
-            <a:avLst/>
-          </a:prstGeom>
-          <a:noFill/>
-          <a:ln/>
-        </p:spPr>
-        <p:txBody>
-          <a:bodyPr wrap="square" lIns="0" tIns="0" rIns="0" bIns="0" rtlCol="0" anchor="ctr"/>
-          <a:lstStyle/>
-          <a:p>
-            <a:pPr marL="0" indent="0">
-              <a:buNone/>
-            </a:pPr>
-            <a:r>
-              <a:rPr lang="en-US" sz="1400" b="1" dirty="0">
-                <a:solidFill>
-                  <a:schemeClr val="tx1"/>
-                </a:solidFill>
-              </a:rPr>
-              <a:t>S</a:t>
-            </a:r>
-            <a:r>
-              <a:rPr lang="en-US" sz="1400" b="1" dirty="0"/>
-              <a:t>ARNENDU DAS       :    24a12res592</a:t>
-            </a:r>
-          </a:p>
-          <a:p>
-            <a:pPr marL="0" indent="0">
-              <a:buNone/>
-            </a:pPr>
-            <a:r>
-              <a:rPr lang="en-US" sz="1400" b="1" dirty="0"/>
-              <a:t>PARVEEN KUMAR     :    24a12res426</a:t>
-            </a:r>
-          </a:p>
-          <a:p>
-            <a:pPr marL="0" indent="0">
-              <a:buNone/>
-            </a:pPr>
-            <a:r>
-              <a:rPr lang="en-US" sz="1400" b="1" dirty="0"/>
-              <a:t>AYUSH RAJ               :    24a12res897</a:t>
-            </a:r>
-          </a:p>
-        </p:txBody>
-      </p:sp>
-      <p:sp>
-        <p:nvSpPr>
-          <p:cNvPr id="25" name="Slide Number Placeholder 0"/>
-          <p:cNvSpPr>
-            <a:spLocks noGrp="1"/>
-          </p:cNvSpPr>
-          <p:nvPr>
-            <p:ph type="sldNum" sz="quarter" idx="4294967295"/>
-          </p:nvPr>
-        </p:nvSpPr>
-        <p:spPr>
-          <a:xfrm>
-            <a:off x="8229600" y="4800600"/>
-            <a:ext cx="749300" cy="301752"/>
-          </a:xfrm>
-          <a:prstGeom prst="rect">
-            <a:avLst/>
-          </a:prstGeom>
-          <a:extLst>
-            <a:ext uri="{C572A759-6A51-4108-AA02-DFA0A04FC94B}">
-              <ma14:wrappingTextBoxFlag xmlns="" xmlns:ma14="http://schemas.microsoft.com/office/mac/drawingml/2011/main" val="0"/>
-            </a:ext>
-          </a:extLst>
-        </p:spPr>
-        <p:txBody>
-          <a:bodyPr/>
-          <a:lstStyle>
-            <a:lvl1pPr>
-              <a:defRPr sz="1000">
-                <a:solidFill>
-                  <a:schemeClr val="accent6"/>
-                </a:solidFill>
-              </a:defRPr>
-            </a:lvl1pPr>
-          </a:lstStyle>
-          <a:p>
-            <a:pPr algn="r"/>
-            <a:fld id="{F7021451-1387-4CA6-816F-3879F97B5CBC}" type="slidenum">
-              <a:rPr lang="en-US" b="0"/>
-              <a:t>2</a:t>
-            </a:fld>
-            <a:endParaRPr lang="en-US" dirty="0"/>
           </a:p>
         </p:txBody>
       </p:sp>
@@ -14816,7 +16016,7 @@
           </a:prstGeom>
           <a:extLst>
             <a:ext uri="{C572A759-6A51-4108-AA02-DFA0A04FC94B}">
-              <ma14:wrappingTextBoxFlag xmlns="" xmlns:ma14="http://schemas.microsoft.com/office/mac/drawingml/2011/main" val="0"/>
+              <ma14:wrappingTextBoxFlag xmlns:ma14="http://schemas.microsoft.com/office/mac/drawingml/2011/main" xmlns="" val="0"/>
             </a:ext>
           </a:extLst>
         </p:spPr>
@@ -15735,7 +16935,7 @@
           </a:prstGeom>
           <a:extLst>
             <a:ext uri="{C572A759-6A51-4108-AA02-DFA0A04FC94B}">
-              <ma14:wrappingTextBoxFlag xmlns="" xmlns:ma14="http://schemas.microsoft.com/office/mac/drawingml/2011/main" val="0"/>
+              <ma14:wrappingTextBoxFlag xmlns:ma14="http://schemas.microsoft.com/office/mac/drawingml/2011/main" xmlns="" val="0"/>
             </a:ext>
           </a:extLst>
         </p:spPr>
@@ -16796,7 +17996,7 @@
           </a:prstGeom>
           <a:extLst>
             <a:ext uri="{C572A759-6A51-4108-AA02-DFA0A04FC94B}">
-              <ma14:wrappingTextBoxFlag xmlns="" xmlns:ma14="http://schemas.microsoft.com/office/mac/drawingml/2011/main" val="0"/>
+              <ma14:wrappingTextBoxFlag xmlns:ma14="http://schemas.microsoft.com/office/mac/drawingml/2011/main" xmlns="" val="0"/>
             </a:ext>
           </a:extLst>
         </p:spPr>
@@ -17273,7 +18473,7 @@
           </a:prstGeom>
           <a:extLst>
             <a:ext uri="{C572A759-6A51-4108-AA02-DFA0A04FC94B}">
-              <ma14:wrappingTextBoxFlag xmlns="" xmlns:ma14="http://schemas.microsoft.com/office/mac/drawingml/2011/main" val="0"/>
+              <ma14:wrappingTextBoxFlag xmlns:ma14="http://schemas.microsoft.com/office/mac/drawingml/2011/main" xmlns="" val="0"/>
             </a:ext>
           </a:extLst>
         </p:spPr>
@@ -18228,7 +19428,7 @@
           </a:prstGeom>
           <a:extLst>
             <a:ext uri="{C572A759-6A51-4108-AA02-DFA0A04FC94B}">
-              <ma14:wrappingTextBoxFlag xmlns="" xmlns:ma14="http://schemas.microsoft.com/office/mac/drawingml/2011/main" val="0"/>
+              <ma14:wrappingTextBoxFlag xmlns:ma14="http://schemas.microsoft.com/office/mac/drawingml/2011/main" xmlns="" val="0"/>
             </a:ext>
           </a:extLst>
         </p:spPr>
@@ -19011,7 +20211,7 @@
           </a:prstGeom>
           <a:extLst>
             <a:ext uri="{C572A759-6A51-4108-AA02-DFA0A04FC94B}">
-              <ma14:wrappingTextBoxFlag xmlns="" xmlns:ma14="http://schemas.microsoft.com/office/mac/drawingml/2011/main" val="0"/>
+              <ma14:wrappingTextBoxFlag xmlns:ma14="http://schemas.microsoft.com/office/mac/drawingml/2011/main" xmlns="" val="0"/>
             </a:ext>
           </a:extLst>
         </p:spPr>
@@ -19858,7 +21058,7 @@
           </a:prstGeom>
           <a:extLst>
             <a:ext uri="{C572A759-6A51-4108-AA02-DFA0A04FC94B}">
-              <ma14:wrappingTextBoxFlag xmlns="" xmlns:ma14="http://schemas.microsoft.com/office/mac/drawingml/2011/main" val="0"/>
+              <ma14:wrappingTextBoxFlag xmlns:ma14="http://schemas.microsoft.com/office/mac/drawingml/2011/main" xmlns="" val="0"/>
             </a:ext>
           </a:extLst>
         </p:spPr>
